--- a/pbl (1).pptx
+++ b/pbl (1).pptx
@@ -4,6 +4,9 @@
   <p:sldMasterIdLst>
     <p:sldMasterId id="2147483648" r:id="rId1"/>
   </p:sldMasterIdLst>
+  <p:notesMasterIdLst>
+    <p:notesMasterId r:id="rId22"/>
+  </p:notesMasterIdLst>
   <p:sldIdLst>
     <p:sldId id="256" r:id="rId2"/>
     <p:sldId id="257" r:id="rId3"/>
@@ -14,11 +17,17 @@
     <p:sldId id="267" r:id="rId8"/>
     <p:sldId id="268" r:id="rId9"/>
     <p:sldId id="269" r:id="rId10"/>
-    <p:sldId id="260" r:id="rId11"/>
-    <p:sldId id="261" r:id="rId12"/>
-    <p:sldId id="262" r:id="rId13"/>
-    <p:sldId id="263" r:id="rId14"/>
-    <p:sldId id="264" r:id="rId15"/>
+    <p:sldId id="270" r:id="rId11"/>
+    <p:sldId id="271" r:id="rId12"/>
+    <p:sldId id="272" r:id="rId13"/>
+    <p:sldId id="273" r:id="rId14"/>
+    <p:sldId id="260" r:id="rId15"/>
+    <p:sldId id="261" r:id="rId16"/>
+    <p:sldId id="274" r:id="rId17"/>
+    <p:sldId id="277" r:id="rId18"/>
+    <p:sldId id="262" r:id="rId19"/>
+    <p:sldId id="263" r:id="rId20"/>
+    <p:sldId id="264" r:id="rId21"/>
   </p:sldIdLst>
   <p:sldSz cx="12192000" cy="6858000"/>
   <p:notesSz cx="6858000" cy="9144000"/>
@@ -125,6 +134,440 @@
 </p:presentation>
 </file>
 
+<file path=ppt/notesMasters/notesMaster1.xml><?xml version="1.0" encoding="utf-8"?>
+<p:notesMaster xmlns:a="http://schemas.openxmlformats.org/drawingml/2006/main" xmlns:r="http://schemas.openxmlformats.org/officeDocument/2006/relationships" xmlns:p="http://schemas.openxmlformats.org/presentationml/2006/main">
+  <p:cSld>
+    <p:bg>
+      <p:bgRef idx="1001">
+        <a:schemeClr val="bg1"/>
+      </p:bgRef>
+    </p:bg>
+    <p:spTree>
+      <p:nvGrpSpPr>
+        <p:cNvPr id="1" name=""/>
+        <p:cNvGrpSpPr/>
+        <p:nvPr/>
+      </p:nvGrpSpPr>
+      <p:grpSpPr>
+        <a:xfrm>
+          <a:off x="0" y="0"/>
+          <a:ext cx="0" cy="0"/>
+          <a:chOff x="0" y="0"/>
+          <a:chExt cx="0" cy="0"/>
+        </a:xfrm>
+      </p:grpSpPr>
+      <p:sp>
+        <p:nvSpPr>
+          <p:cNvPr id="2" name="Header Placeholder 1"/>
+          <p:cNvSpPr>
+            <a:spLocks noGrp="1"/>
+          </p:cNvSpPr>
+          <p:nvPr>
+            <p:ph type="hdr" sz="quarter"/>
+          </p:nvPr>
+        </p:nvSpPr>
+        <p:spPr>
+          <a:xfrm>
+            <a:off x="0" y="0"/>
+            <a:ext cx="2971800" cy="458788"/>
+          </a:xfrm>
+          <a:prstGeom prst="rect">
+            <a:avLst/>
+          </a:prstGeom>
+        </p:spPr>
+        <p:txBody>
+          <a:bodyPr vert="horz" lIns="91440" tIns="45720" rIns="91440" bIns="45720" rtlCol="0"/>
+          <a:lstStyle>
+            <a:lvl1pPr algn="l">
+              <a:defRPr sz="1200"/>
+            </a:lvl1pPr>
+          </a:lstStyle>
+          <a:p>
+            <a:endParaRPr lang="en-IN"/>
+          </a:p>
+        </p:txBody>
+      </p:sp>
+      <p:sp>
+        <p:nvSpPr>
+          <p:cNvPr id="3" name="Date Placeholder 2"/>
+          <p:cNvSpPr>
+            <a:spLocks noGrp="1"/>
+          </p:cNvSpPr>
+          <p:nvPr>
+            <p:ph type="dt" idx="1"/>
+          </p:nvPr>
+        </p:nvSpPr>
+        <p:spPr>
+          <a:xfrm>
+            <a:off x="3884613" y="0"/>
+            <a:ext cx="2971800" cy="458788"/>
+          </a:xfrm>
+          <a:prstGeom prst="rect">
+            <a:avLst/>
+          </a:prstGeom>
+        </p:spPr>
+        <p:txBody>
+          <a:bodyPr vert="horz" lIns="91440" tIns="45720" rIns="91440" bIns="45720" rtlCol="0"/>
+          <a:lstStyle>
+            <a:lvl1pPr algn="r">
+              <a:defRPr sz="1200"/>
+            </a:lvl1pPr>
+          </a:lstStyle>
+          <a:p>
+            <a:fld id="{95C3BAE4-BDCD-41A0-9F03-51070A5B1C8C}" type="datetimeFigureOut">
+              <a:rPr lang="en-IN" smtClean="0"/>
+              <a:t>19-02-2026</a:t>
+            </a:fld>
+            <a:endParaRPr lang="en-IN"/>
+          </a:p>
+        </p:txBody>
+      </p:sp>
+      <p:sp>
+        <p:nvSpPr>
+          <p:cNvPr id="4" name="Slide Image Placeholder 3"/>
+          <p:cNvSpPr>
+            <a:spLocks noGrp="1" noRot="1" noChangeAspect="1"/>
+          </p:cNvSpPr>
+          <p:nvPr>
+            <p:ph type="sldImg" idx="2"/>
+          </p:nvPr>
+        </p:nvSpPr>
+        <p:spPr>
+          <a:xfrm>
+            <a:off x="685800" y="1143000"/>
+            <a:ext cx="5486400" cy="3086100"/>
+          </a:xfrm>
+          <a:prstGeom prst="rect">
+            <a:avLst/>
+          </a:prstGeom>
+          <a:noFill/>
+          <a:ln w="12700">
+            <a:solidFill>
+              <a:prstClr val="black"/>
+            </a:solidFill>
+          </a:ln>
+        </p:spPr>
+        <p:txBody>
+          <a:bodyPr vert="horz" lIns="91440" tIns="45720" rIns="91440" bIns="45720" rtlCol="0" anchor="ctr"/>
+          <a:lstStyle/>
+          <a:p>
+            <a:endParaRPr lang="en-IN"/>
+          </a:p>
+        </p:txBody>
+      </p:sp>
+      <p:sp>
+        <p:nvSpPr>
+          <p:cNvPr id="5" name="Notes Placeholder 4"/>
+          <p:cNvSpPr>
+            <a:spLocks noGrp="1"/>
+          </p:cNvSpPr>
+          <p:nvPr>
+            <p:ph type="body" sz="quarter" idx="3"/>
+          </p:nvPr>
+        </p:nvSpPr>
+        <p:spPr>
+          <a:xfrm>
+            <a:off x="685800" y="4400550"/>
+            <a:ext cx="5486400" cy="3600450"/>
+          </a:xfrm>
+          <a:prstGeom prst="rect">
+            <a:avLst/>
+          </a:prstGeom>
+        </p:spPr>
+        <p:txBody>
+          <a:bodyPr vert="horz" lIns="91440" tIns="45720" rIns="91440" bIns="45720" rtlCol="0"/>
+          <a:lstStyle/>
+          <a:p>
+            <a:pPr lvl="0"/>
+            <a:r>
+              <a:rPr lang="en-US"/>
+              <a:t>Click to edit Master text styles</a:t>
+            </a:r>
+          </a:p>
+          <a:p>
+            <a:pPr lvl="1"/>
+            <a:r>
+              <a:rPr lang="en-US"/>
+              <a:t>Second level</a:t>
+            </a:r>
+          </a:p>
+          <a:p>
+            <a:pPr lvl="2"/>
+            <a:r>
+              <a:rPr lang="en-US"/>
+              <a:t>Third level</a:t>
+            </a:r>
+          </a:p>
+          <a:p>
+            <a:pPr lvl="3"/>
+            <a:r>
+              <a:rPr lang="en-US"/>
+              <a:t>Fourth level</a:t>
+            </a:r>
+          </a:p>
+          <a:p>
+            <a:pPr lvl="4"/>
+            <a:r>
+              <a:rPr lang="en-US"/>
+              <a:t>Fifth level</a:t>
+            </a:r>
+            <a:endParaRPr lang="en-IN"/>
+          </a:p>
+        </p:txBody>
+      </p:sp>
+      <p:sp>
+        <p:nvSpPr>
+          <p:cNvPr id="6" name="Footer Placeholder 5"/>
+          <p:cNvSpPr>
+            <a:spLocks noGrp="1"/>
+          </p:cNvSpPr>
+          <p:nvPr>
+            <p:ph type="ftr" sz="quarter" idx="4"/>
+          </p:nvPr>
+        </p:nvSpPr>
+        <p:spPr>
+          <a:xfrm>
+            <a:off x="0" y="8685213"/>
+            <a:ext cx="2971800" cy="458787"/>
+          </a:xfrm>
+          <a:prstGeom prst="rect">
+            <a:avLst/>
+          </a:prstGeom>
+        </p:spPr>
+        <p:txBody>
+          <a:bodyPr vert="horz" lIns="91440" tIns="45720" rIns="91440" bIns="45720" rtlCol="0" anchor="b"/>
+          <a:lstStyle>
+            <a:lvl1pPr algn="l">
+              <a:defRPr sz="1200"/>
+            </a:lvl1pPr>
+          </a:lstStyle>
+          <a:p>
+            <a:endParaRPr lang="en-IN"/>
+          </a:p>
+        </p:txBody>
+      </p:sp>
+      <p:sp>
+        <p:nvSpPr>
+          <p:cNvPr id="7" name="Slide Number Placeholder 6"/>
+          <p:cNvSpPr>
+            <a:spLocks noGrp="1"/>
+          </p:cNvSpPr>
+          <p:nvPr>
+            <p:ph type="sldNum" sz="quarter" idx="5"/>
+          </p:nvPr>
+        </p:nvSpPr>
+        <p:spPr>
+          <a:xfrm>
+            <a:off x="3884613" y="8685213"/>
+            <a:ext cx="2971800" cy="458787"/>
+          </a:xfrm>
+          <a:prstGeom prst="rect">
+            <a:avLst/>
+          </a:prstGeom>
+        </p:spPr>
+        <p:txBody>
+          <a:bodyPr vert="horz" lIns="91440" tIns="45720" rIns="91440" bIns="45720" rtlCol="0" anchor="b"/>
+          <a:lstStyle>
+            <a:lvl1pPr algn="r">
+              <a:defRPr sz="1200"/>
+            </a:lvl1pPr>
+          </a:lstStyle>
+          <a:p>
+            <a:fld id="{3ED6E084-296B-46DF-903B-4E8546D12865}" type="slidenum">
+              <a:rPr lang="en-IN" smtClean="0"/>
+              <a:t>‹#›</a:t>
+            </a:fld>
+            <a:endParaRPr lang="en-IN"/>
+          </a:p>
+        </p:txBody>
+      </p:sp>
+    </p:spTree>
+    <p:extLst>
+      <p:ext uri="{BB962C8B-B14F-4D97-AF65-F5344CB8AC3E}">
+        <p14:creationId xmlns:p14="http://schemas.microsoft.com/office/powerpoint/2010/main" val="2799507289"/>
+      </p:ext>
+    </p:extLst>
+  </p:cSld>
+  <p:clrMap bg1="lt1" tx1="dk1" bg2="lt2" tx2="dk2" accent1="accent1" accent2="accent2" accent3="accent3" accent4="accent4" accent5="accent5" accent6="accent6" hlink="hlink" folHlink="folHlink"/>
+  <p:notesStyle>
+    <a:lvl1pPr marL="0" algn="l" defTabSz="914400" rtl="0" eaLnBrk="1" latinLnBrk="0" hangingPunct="1">
+      <a:defRPr sz="1200" kern="1200">
+        <a:solidFill>
+          <a:schemeClr val="tx1"/>
+        </a:solidFill>
+        <a:latin typeface="+mn-lt"/>
+        <a:ea typeface="+mn-ea"/>
+        <a:cs typeface="+mn-cs"/>
+      </a:defRPr>
+    </a:lvl1pPr>
+    <a:lvl2pPr marL="457200" algn="l" defTabSz="914400" rtl="0" eaLnBrk="1" latinLnBrk="0" hangingPunct="1">
+      <a:defRPr sz="1200" kern="1200">
+        <a:solidFill>
+          <a:schemeClr val="tx1"/>
+        </a:solidFill>
+        <a:latin typeface="+mn-lt"/>
+        <a:ea typeface="+mn-ea"/>
+        <a:cs typeface="+mn-cs"/>
+      </a:defRPr>
+    </a:lvl2pPr>
+    <a:lvl3pPr marL="914400" algn="l" defTabSz="914400" rtl="0" eaLnBrk="1" latinLnBrk="0" hangingPunct="1">
+      <a:defRPr sz="1200" kern="1200">
+        <a:solidFill>
+          <a:schemeClr val="tx1"/>
+        </a:solidFill>
+        <a:latin typeface="+mn-lt"/>
+        <a:ea typeface="+mn-ea"/>
+        <a:cs typeface="+mn-cs"/>
+      </a:defRPr>
+    </a:lvl3pPr>
+    <a:lvl4pPr marL="1371600" algn="l" defTabSz="914400" rtl="0" eaLnBrk="1" latinLnBrk="0" hangingPunct="1">
+      <a:defRPr sz="1200" kern="1200">
+        <a:solidFill>
+          <a:schemeClr val="tx1"/>
+        </a:solidFill>
+        <a:latin typeface="+mn-lt"/>
+        <a:ea typeface="+mn-ea"/>
+        <a:cs typeface="+mn-cs"/>
+      </a:defRPr>
+    </a:lvl4pPr>
+    <a:lvl5pPr marL="1828800" algn="l" defTabSz="914400" rtl="0" eaLnBrk="1" latinLnBrk="0" hangingPunct="1">
+      <a:defRPr sz="1200" kern="1200">
+        <a:solidFill>
+          <a:schemeClr val="tx1"/>
+        </a:solidFill>
+        <a:latin typeface="+mn-lt"/>
+        <a:ea typeface="+mn-ea"/>
+        <a:cs typeface="+mn-cs"/>
+      </a:defRPr>
+    </a:lvl5pPr>
+    <a:lvl6pPr marL="2286000" algn="l" defTabSz="914400" rtl="0" eaLnBrk="1" latinLnBrk="0" hangingPunct="1">
+      <a:defRPr sz="1200" kern="1200">
+        <a:solidFill>
+          <a:schemeClr val="tx1"/>
+        </a:solidFill>
+        <a:latin typeface="+mn-lt"/>
+        <a:ea typeface="+mn-ea"/>
+        <a:cs typeface="+mn-cs"/>
+      </a:defRPr>
+    </a:lvl6pPr>
+    <a:lvl7pPr marL="2743200" algn="l" defTabSz="914400" rtl="0" eaLnBrk="1" latinLnBrk="0" hangingPunct="1">
+      <a:defRPr sz="1200" kern="1200">
+        <a:solidFill>
+          <a:schemeClr val="tx1"/>
+        </a:solidFill>
+        <a:latin typeface="+mn-lt"/>
+        <a:ea typeface="+mn-ea"/>
+        <a:cs typeface="+mn-cs"/>
+      </a:defRPr>
+    </a:lvl7pPr>
+    <a:lvl8pPr marL="3200400" algn="l" defTabSz="914400" rtl="0" eaLnBrk="1" latinLnBrk="0" hangingPunct="1">
+      <a:defRPr sz="1200" kern="1200">
+        <a:solidFill>
+          <a:schemeClr val="tx1"/>
+        </a:solidFill>
+        <a:latin typeface="+mn-lt"/>
+        <a:ea typeface="+mn-ea"/>
+        <a:cs typeface="+mn-cs"/>
+      </a:defRPr>
+    </a:lvl8pPr>
+    <a:lvl9pPr marL="3657600" algn="l" defTabSz="914400" rtl="0" eaLnBrk="1" latinLnBrk="0" hangingPunct="1">
+      <a:defRPr sz="1200" kern="1200">
+        <a:solidFill>
+          <a:schemeClr val="tx1"/>
+        </a:solidFill>
+        <a:latin typeface="+mn-lt"/>
+        <a:ea typeface="+mn-ea"/>
+        <a:cs typeface="+mn-cs"/>
+      </a:defRPr>
+    </a:lvl9pPr>
+  </p:notesStyle>
+</p:notesMaster>
+</file>
+
+<file path=ppt/notesSlides/notesSlide1.xml><?xml version="1.0" encoding="utf-8"?>
+<p:notes xmlns:a="http://schemas.openxmlformats.org/drawingml/2006/main" xmlns:r="http://schemas.openxmlformats.org/officeDocument/2006/relationships" xmlns:p="http://schemas.openxmlformats.org/presentationml/2006/main">
+  <p:cSld>
+    <p:spTree>
+      <p:nvGrpSpPr>
+        <p:cNvPr id="1" name=""/>
+        <p:cNvGrpSpPr/>
+        <p:nvPr/>
+      </p:nvGrpSpPr>
+      <p:grpSpPr>
+        <a:xfrm>
+          <a:off x="0" y="0"/>
+          <a:ext cx="0" cy="0"/>
+          <a:chOff x="0" y="0"/>
+          <a:chExt cx="0" cy="0"/>
+        </a:xfrm>
+      </p:grpSpPr>
+      <p:sp>
+        <p:nvSpPr>
+          <p:cNvPr id="2" name="Slide Image Placeholder 1"/>
+          <p:cNvSpPr>
+            <a:spLocks noGrp="1" noRot="1" noChangeAspect="1"/>
+          </p:cNvSpPr>
+          <p:nvPr>
+            <p:ph type="sldImg"/>
+          </p:nvPr>
+        </p:nvSpPr>
+        <p:spPr/>
+      </p:sp>
+      <p:sp>
+        <p:nvSpPr>
+          <p:cNvPr id="3" name="Notes Placeholder 2"/>
+          <p:cNvSpPr>
+            <a:spLocks noGrp="1"/>
+          </p:cNvSpPr>
+          <p:nvPr>
+            <p:ph type="body" idx="1"/>
+          </p:nvPr>
+        </p:nvSpPr>
+        <p:spPr/>
+        <p:txBody>
+          <a:bodyPr/>
+          <a:lstStyle/>
+          <a:p>
+            <a:endParaRPr lang="en-IN" dirty="0"/>
+          </a:p>
+        </p:txBody>
+      </p:sp>
+      <p:sp>
+        <p:nvSpPr>
+          <p:cNvPr id="4" name="Slide Number Placeholder 3"/>
+          <p:cNvSpPr>
+            <a:spLocks noGrp="1"/>
+          </p:cNvSpPr>
+          <p:nvPr>
+            <p:ph type="sldNum" sz="quarter" idx="5"/>
+          </p:nvPr>
+        </p:nvSpPr>
+        <p:spPr/>
+        <p:txBody>
+          <a:bodyPr/>
+          <a:lstStyle/>
+          <a:p>
+            <a:fld id="{3ED6E084-296B-46DF-903B-4E8546D12865}" type="slidenum">
+              <a:rPr lang="en-IN" smtClean="0"/>
+              <a:t>13</a:t>
+            </a:fld>
+            <a:endParaRPr lang="en-IN"/>
+          </a:p>
+        </p:txBody>
+      </p:sp>
+    </p:spTree>
+    <p:extLst>
+      <p:ext uri="{BB962C8B-B14F-4D97-AF65-F5344CB8AC3E}">
+        <p14:creationId xmlns:p14="http://schemas.microsoft.com/office/powerpoint/2010/main" val="1882347487"/>
+      </p:ext>
+    </p:extLst>
+  </p:cSld>
+  <p:clrMapOvr>
+    <a:masterClrMapping/>
+  </p:clrMapOvr>
+</p:notes>
+</file>
+
 <file path=ppt/slideLayouts/slideLayout1.xml><?xml version="1.0" encoding="utf-8"?>
 <p:sldLayout xmlns:a="http://schemas.openxmlformats.org/drawingml/2006/main" xmlns:r="http://schemas.openxmlformats.org/officeDocument/2006/relationships" xmlns:p="http://schemas.openxmlformats.org/presentationml/2006/main" type="title" preserve="1">
   <p:cSld name="Title Slide">
@@ -274,7 +717,7 @@
           <a:p>
             <a:fld id="{A7FACB4A-C46D-47C8-95BF-463F9F428625}" type="datetimeFigureOut">
               <a:rPr lang="en-IN" smtClean="0"/>
-              <a:t>15-02-2026</a:t>
+              <a:t>19-02-2026</a:t>
             </a:fld>
             <a:endParaRPr lang="en-IN"/>
           </a:p>
@@ -474,7 +917,7 @@
           <a:p>
             <a:fld id="{A7FACB4A-C46D-47C8-95BF-463F9F428625}" type="datetimeFigureOut">
               <a:rPr lang="en-IN" smtClean="0"/>
-              <a:t>15-02-2026</a:t>
+              <a:t>19-02-2026</a:t>
             </a:fld>
             <a:endParaRPr lang="en-IN"/>
           </a:p>
@@ -684,7 +1127,7 @@
           <a:p>
             <a:fld id="{A7FACB4A-C46D-47C8-95BF-463F9F428625}" type="datetimeFigureOut">
               <a:rPr lang="en-IN" smtClean="0"/>
-              <a:t>15-02-2026</a:t>
+              <a:t>19-02-2026</a:t>
             </a:fld>
             <a:endParaRPr lang="en-IN"/>
           </a:p>
@@ -884,7 +1327,7 @@
           <a:p>
             <a:fld id="{A7FACB4A-C46D-47C8-95BF-463F9F428625}" type="datetimeFigureOut">
               <a:rPr lang="en-IN" smtClean="0"/>
-              <a:t>15-02-2026</a:t>
+              <a:t>19-02-2026</a:t>
             </a:fld>
             <a:endParaRPr lang="en-IN"/>
           </a:p>
@@ -1160,7 +1603,7 @@
           <a:p>
             <a:fld id="{A7FACB4A-C46D-47C8-95BF-463F9F428625}" type="datetimeFigureOut">
               <a:rPr lang="en-IN" smtClean="0"/>
-              <a:t>15-02-2026</a:t>
+              <a:t>19-02-2026</a:t>
             </a:fld>
             <a:endParaRPr lang="en-IN"/>
           </a:p>
@@ -1428,7 +1871,7 @@
           <a:p>
             <a:fld id="{A7FACB4A-C46D-47C8-95BF-463F9F428625}" type="datetimeFigureOut">
               <a:rPr lang="en-IN" smtClean="0"/>
-              <a:t>15-02-2026</a:t>
+              <a:t>19-02-2026</a:t>
             </a:fld>
             <a:endParaRPr lang="en-IN"/>
           </a:p>
@@ -1843,7 +2286,7 @@
           <a:p>
             <a:fld id="{A7FACB4A-C46D-47C8-95BF-463F9F428625}" type="datetimeFigureOut">
               <a:rPr lang="en-IN" smtClean="0"/>
-              <a:t>15-02-2026</a:t>
+              <a:t>19-02-2026</a:t>
             </a:fld>
             <a:endParaRPr lang="en-IN"/>
           </a:p>
@@ -1985,7 +2428,7 @@
           <a:p>
             <a:fld id="{A7FACB4A-C46D-47C8-95BF-463F9F428625}" type="datetimeFigureOut">
               <a:rPr lang="en-IN" smtClean="0"/>
-              <a:t>15-02-2026</a:t>
+              <a:t>19-02-2026</a:t>
             </a:fld>
             <a:endParaRPr lang="en-IN"/>
           </a:p>
@@ -2098,7 +2541,7 @@
           <a:p>
             <a:fld id="{A7FACB4A-C46D-47C8-95BF-463F9F428625}" type="datetimeFigureOut">
               <a:rPr lang="en-IN" smtClean="0"/>
-              <a:t>15-02-2026</a:t>
+              <a:t>19-02-2026</a:t>
             </a:fld>
             <a:endParaRPr lang="en-IN"/>
           </a:p>
@@ -2411,7 +2854,7 @@
           <a:p>
             <a:fld id="{A7FACB4A-C46D-47C8-95BF-463F9F428625}" type="datetimeFigureOut">
               <a:rPr lang="en-IN" smtClean="0"/>
-              <a:t>15-02-2026</a:t>
+              <a:t>19-02-2026</a:t>
             </a:fld>
             <a:endParaRPr lang="en-IN"/>
           </a:p>
@@ -2700,7 +3143,7 @@
           <a:p>
             <a:fld id="{A7FACB4A-C46D-47C8-95BF-463F9F428625}" type="datetimeFigureOut">
               <a:rPr lang="en-IN" smtClean="0"/>
-              <a:t>15-02-2026</a:t>
+              <a:t>19-02-2026</a:t>
             </a:fld>
             <a:endParaRPr lang="en-IN"/>
           </a:p>
@@ -2943,7 +3386,7 @@
           <a:p>
             <a:fld id="{A7FACB4A-C46D-47C8-95BF-463F9F428625}" type="datetimeFigureOut">
               <a:rPr lang="en-IN" smtClean="0"/>
-              <a:t>15-02-2026</a:t>
+              <a:t>19-02-2026</a:t>
             </a:fld>
             <a:endParaRPr lang="en-IN"/>
           </a:p>
@@ -3811,7 +4254,7 @@
           <p:cNvPr id="2" name="Title 1">
             <a:extLst>
               <a:ext uri="{FF2B5EF4-FFF2-40B4-BE49-F238E27FC236}">
-                <a16:creationId xmlns:a16="http://schemas.microsoft.com/office/drawing/2014/main" id="{C5EA1533-4BE1-DF5E-D485-BD167C2BD85D}"/>
+                <a16:creationId xmlns:a16="http://schemas.microsoft.com/office/drawing/2014/main" id="{98FB8C5A-264F-4E7B-999B-171939BAC91F}"/>
               </a:ext>
             </a:extLst>
           </p:cNvPr>
@@ -3824,8 +4267,8 @@
         </p:nvSpPr>
         <p:spPr>
           <a:xfrm>
-            <a:off x="0" y="-69574"/>
-            <a:ext cx="10515600" cy="1004888"/>
+            <a:off x="169333" y="18255"/>
+            <a:ext cx="10515600" cy="1325563"/>
           </a:xfrm>
         </p:spPr>
         <p:txBody>
@@ -3837,8 +4280,9 @@
                 <a:latin typeface="Times New Roman" panose="02020603050405020304" pitchFamily="18" charset="0"/>
                 <a:cs typeface="Times New Roman" panose="02020603050405020304" pitchFamily="18" charset="0"/>
               </a:rPr>
-              <a:t>Problem Statement</a:t>
-            </a:r>
+              <a:t>Literature Review </a:t>
+            </a:r>
+            <a:endParaRPr lang="en-IN" dirty="0"/>
           </a:p>
         </p:txBody>
       </p:sp>
@@ -3847,7 +4291,7 @@
           <p:cNvPr id="3" name="Content Placeholder 2">
             <a:extLst>
               <a:ext uri="{FF2B5EF4-FFF2-40B4-BE49-F238E27FC236}">
-                <a16:creationId xmlns:a16="http://schemas.microsoft.com/office/drawing/2014/main" id="{CB024CC5-00AF-876C-F7CA-146754384CB0}"/>
+                <a16:creationId xmlns:a16="http://schemas.microsoft.com/office/drawing/2014/main" id="{86B45320-3E5C-82B4-706A-DA11D8591C26}"/>
               </a:ext>
             </a:extLst>
           </p:cNvPr>
@@ -3860,93 +4304,122 @@
         </p:nvSpPr>
         <p:spPr>
           <a:xfrm>
-            <a:off x="79514" y="1222513"/>
-            <a:ext cx="11618842" cy="5406887"/>
+            <a:off x="169333" y="982133"/>
+            <a:ext cx="11184467" cy="5731934"/>
           </a:xfrm>
         </p:spPr>
         <p:txBody>
           <a:bodyPr>
-            <a:normAutofit lnSpcReduction="10000"/>
+            <a:normAutofit/>
           </a:bodyPr>
           <a:lstStyle/>
           <a:p>
+            <a:pPr marL="0" indent="0">
+              <a:buNone/>
+            </a:pPr>
+            <a:r>
+              <a:rPr lang="en-US" sz="2400" b="1" dirty="0" err="1">
+                <a:latin typeface="Times New Roman" panose="02020603050405020304" pitchFamily="18" charset="0"/>
+                <a:cs typeface="Times New Roman" panose="02020603050405020304" pitchFamily="18" charset="0"/>
+              </a:rPr>
+              <a:t>PrivSpike</a:t>
+            </a:r>
+            <a:r>
+              <a:rPr lang="en-US" sz="2400" b="1" dirty="0">
+                <a:latin typeface="Times New Roman" panose="02020603050405020304" pitchFamily="18" charset="0"/>
+                <a:cs typeface="Times New Roman" panose="02020603050405020304" pitchFamily="18" charset="0"/>
+              </a:rPr>
+              <a:t>: Employing Homomorphic Encryption for Private Inference of Deep Spiking Neural Networks (2025)</a:t>
+            </a:r>
+          </a:p>
+          <a:p>
             <a:pPr algn="just"/>
             <a:r>
-              <a:rPr lang="en-US" dirty="0">
-                <a:latin typeface="Times New Roman" panose="02020603050405020304" pitchFamily="18" charset="0"/>
-                <a:cs typeface="Times New Roman" panose="02020603050405020304" pitchFamily="18" charset="0"/>
-              </a:rPr>
-              <a:t>Traditional machine learning models require access to unencrypted data, which creates privacy risks for sensitive information.</a:t>
+              <a:rPr lang="en-US" sz="2400" dirty="0">
+                <a:latin typeface="Times New Roman" panose="02020603050405020304" pitchFamily="18" charset="0"/>
+                <a:cs typeface="Times New Roman" panose="02020603050405020304" pitchFamily="18" charset="0"/>
+              </a:rPr>
+              <a:t> </a:t>
+            </a:r>
+            <a:r>
+              <a:rPr lang="en-IN" sz="2400" dirty="0" err="1">
+                <a:latin typeface="Times New Roman" panose="02020603050405020304" pitchFamily="18" charset="0"/>
+                <a:cs typeface="Times New Roman" panose="02020603050405020304" pitchFamily="18" charset="0"/>
+              </a:rPr>
+              <a:t>PrivSpike</a:t>
+            </a:r>
+            <a:r>
+              <a:rPr lang="en-IN" sz="2400" dirty="0">
+                <a:latin typeface="Times New Roman" panose="02020603050405020304" pitchFamily="18" charset="0"/>
+                <a:cs typeface="Times New Roman" panose="02020603050405020304" pitchFamily="18" charset="0"/>
+              </a:rPr>
+              <a:t> introduces a privacy-preserving framework that applies homomorphic encryption (CKKS) to enable encrypted inference on Spiking Neural Networks.</a:t>
             </a:r>
           </a:p>
           <a:p>
             <a:pPr algn="just"/>
-            <a:endParaRPr lang="en-US" dirty="0">
+            <a:r>
+              <a:rPr lang="en-US" sz="2400" dirty="0">
+                <a:latin typeface="Times New Roman" panose="02020603050405020304" pitchFamily="18" charset="0"/>
+                <a:cs typeface="Times New Roman" panose="02020603050405020304" pitchFamily="18" charset="0"/>
+              </a:rPr>
+              <a:t>The authors designed </a:t>
+            </a:r>
+            <a:r>
+              <a:rPr lang="en-US" sz="2400" dirty="0" err="1">
+                <a:latin typeface="Times New Roman" panose="02020603050405020304" pitchFamily="18" charset="0"/>
+                <a:cs typeface="Times New Roman" panose="02020603050405020304" pitchFamily="18" charset="0"/>
+              </a:rPr>
+              <a:t>PrivSpike</a:t>
+            </a:r>
+            <a:r>
+              <a:rPr lang="en-US" sz="2400" dirty="0">
+                <a:latin typeface="Times New Roman" panose="02020603050405020304" pitchFamily="18" charset="0"/>
+                <a:cs typeface="Times New Roman" panose="02020603050405020304" pitchFamily="18" charset="0"/>
+              </a:rPr>
+              <a:t> to work with SNNs by transforming neuron activation functions into polynomial approximations suitable for homomorphic computation.</a:t>
+            </a:r>
+          </a:p>
+          <a:p>
+            <a:pPr algn="just"/>
+            <a:r>
+              <a:rPr lang="en-US" sz="2400" dirty="0">
+                <a:latin typeface="Times New Roman" panose="02020603050405020304" pitchFamily="18" charset="0"/>
+                <a:cs typeface="Times New Roman" panose="02020603050405020304" pitchFamily="18" charset="0"/>
+              </a:rPr>
+              <a:t>They developed a specialized polynomial approximation algorithm for efficient SNN inference.</a:t>
+            </a:r>
+          </a:p>
+          <a:p>
+            <a:pPr algn="just"/>
+            <a:r>
+              <a:rPr lang="en-US" sz="2400" dirty="0">
+                <a:latin typeface="Times New Roman" panose="02020603050405020304" pitchFamily="18" charset="0"/>
+                <a:cs typeface="Times New Roman" panose="02020603050405020304" pitchFamily="18" charset="0"/>
+              </a:rPr>
+              <a:t>They developed a scheme-switching algorithm to trade off precision and computational cost.</a:t>
+            </a:r>
+          </a:p>
+          <a:p>
+            <a:pPr algn="just"/>
+            <a:r>
+              <a:rPr lang="en-US" sz="2400" dirty="0">
+                <a:latin typeface="Times New Roman" panose="02020603050405020304" pitchFamily="18" charset="0"/>
+                <a:cs typeface="Times New Roman" panose="02020603050405020304" pitchFamily="18" charset="0"/>
+              </a:rPr>
+              <a:t> Their methods deliver high accuracy across multiple datasets and support deep models however  the computational costs remain high especially for complex tasks.</a:t>
+            </a:r>
+            <a:endParaRPr lang="en-IN" sz="2400" dirty="0">
               <a:latin typeface="Times New Roman" panose="02020603050405020304" pitchFamily="18" charset="0"/>
               <a:cs typeface="Times New Roman" panose="02020603050405020304" pitchFamily="18" charset="0"/>
             </a:endParaRPr>
           </a:p>
-          <a:p>
-            <a:pPr algn="just"/>
-            <a:r>
-              <a:rPr lang="en-US" dirty="0">
-                <a:latin typeface="Times New Roman" panose="02020603050405020304" pitchFamily="18" charset="0"/>
-                <a:cs typeface="Times New Roman" panose="02020603050405020304" pitchFamily="18" charset="0"/>
-              </a:rPr>
-              <a:t>Existing encryption-based approaches are promising but often slow and computationally expensive, making them difficult to use in real world scenarios.</a:t>
-            </a:r>
-          </a:p>
-          <a:p>
-            <a:pPr algn="just"/>
-            <a:endParaRPr lang="en-US" dirty="0">
-              <a:latin typeface="Times New Roman" panose="02020603050405020304" pitchFamily="18" charset="0"/>
-              <a:cs typeface="Times New Roman" panose="02020603050405020304" pitchFamily="18" charset="0"/>
-            </a:endParaRPr>
-          </a:p>
-          <a:p>
-            <a:pPr algn="just"/>
-            <a:r>
-              <a:rPr lang="en-US" dirty="0">
-                <a:latin typeface="Times New Roman" panose="02020603050405020304" pitchFamily="18" charset="0"/>
-                <a:cs typeface="Times New Roman" panose="02020603050405020304" pitchFamily="18" charset="0"/>
-              </a:rPr>
-              <a:t>Therefore, there is a need to study how to train ML models on encrypted data efficiently, while maintaining model accuracy and privacy.</a:t>
-            </a:r>
-          </a:p>
-          <a:p>
-            <a:pPr marL="0" indent="0" algn="just">
-              <a:buNone/>
-            </a:pPr>
-            <a:endParaRPr lang="en-US" dirty="0">
-              <a:latin typeface="Times New Roman" panose="02020603050405020304" pitchFamily="18" charset="0"/>
-              <a:cs typeface="Times New Roman" panose="02020603050405020304" pitchFamily="18" charset="0"/>
-            </a:endParaRPr>
-          </a:p>
-          <a:p>
-            <a:pPr algn="just"/>
-            <a:r>
-              <a:rPr lang="en-US" dirty="0">
-                <a:latin typeface="Times New Roman" panose="02020603050405020304" pitchFamily="18" charset="0"/>
-                <a:cs typeface="Times New Roman" panose="02020603050405020304" pitchFamily="18" charset="0"/>
-              </a:rPr>
-              <a:t>From the above studies we can see the approaches despite being advanced are approximate (not exact), error accumulates as heavier computation is involved. The schemes are slow and heavy</a:t>
-            </a:r>
-          </a:p>
-          <a:p>
-            <a:pPr marL="0" indent="0" algn="just">
-              <a:buNone/>
-            </a:pPr>
-            <a:endParaRPr lang="en-IN" dirty="0">
-              <a:latin typeface="Times New Roman" panose="02020603050405020304" pitchFamily="18" charset="0"/>
-              <a:cs typeface="Times New Roman" panose="02020603050405020304" pitchFamily="18" charset="0"/>
-            </a:endParaRPr>
-          </a:p>
         </p:txBody>
       </p:sp>
     </p:spTree>
     <p:extLst>
       <p:ext uri="{BB962C8B-B14F-4D97-AF65-F5344CB8AC3E}">
-        <p14:creationId xmlns:p14="http://schemas.microsoft.com/office/powerpoint/2010/main" val="2374707807"/>
+        <p14:creationId xmlns:p14="http://schemas.microsoft.com/office/powerpoint/2010/main" val="2979990262"/>
       </p:ext>
     </p:extLst>
   </p:cSld>
@@ -3978,6 +4451,1441 @@
           <p:cNvPr id="2" name="Title 1">
             <a:extLst>
               <a:ext uri="{FF2B5EF4-FFF2-40B4-BE49-F238E27FC236}">
+                <a16:creationId xmlns:a16="http://schemas.microsoft.com/office/drawing/2014/main" id="{306883A2-4E6C-64BA-A9F9-01D3027A3362}"/>
+              </a:ext>
+            </a:extLst>
+          </p:cNvPr>
+          <p:cNvSpPr>
+            <a:spLocks noGrp="1"/>
+          </p:cNvSpPr>
+          <p:nvPr>
+            <p:ph type="title"/>
+          </p:nvPr>
+        </p:nvSpPr>
+        <p:spPr>
+          <a:xfrm>
+            <a:off x="101600" y="-262466"/>
+            <a:ext cx="11116733" cy="1462088"/>
+          </a:xfrm>
+        </p:spPr>
+        <p:txBody>
+          <a:bodyPr/>
+          <a:lstStyle/>
+          <a:p>
+            <a:r>
+              <a:rPr lang="en-IN" dirty="0">
+                <a:latin typeface="Times New Roman" panose="02020603050405020304" pitchFamily="18" charset="0"/>
+                <a:cs typeface="Times New Roman" panose="02020603050405020304" pitchFamily="18" charset="0"/>
+              </a:rPr>
+              <a:t>Literature Review </a:t>
+            </a:r>
+            <a:endParaRPr lang="en-IN" dirty="0"/>
+          </a:p>
+        </p:txBody>
+      </p:sp>
+      <p:sp>
+        <p:nvSpPr>
+          <p:cNvPr id="3" name="Content Placeholder 2">
+            <a:extLst>
+              <a:ext uri="{FF2B5EF4-FFF2-40B4-BE49-F238E27FC236}">
+                <a16:creationId xmlns:a16="http://schemas.microsoft.com/office/drawing/2014/main" id="{9620578A-445C-CFE8-7E0D-9BED730681D8}"/>
+              </a:ext>
+            </a:extLst>
+          </p:cNvPr>
+          <p:cNvSpPr>
+            <a:spLocks noGrp="1"/>
+          </p:cNvSpPr>
+          <p:nvPr>
+            <p:ph idx="1"/>
+          </p:nvPr>
+        </p:nvSpPr>
+        <p:spPr>
+          <a:xfrm>
+            <a:off x="304800" y="863600"/>
+            <a:ext cx="11049000" cy="5816600"/>
+          </a:xfrm>
+        </p:spPr>
+        <p:txBody>
+          <a:bodyPr>
+            <a:normAutofit fontScale="92500" lnSpcReduction="20000"/>
+          </a:bodyPr>
+          <a:lstStyle/>
+          <a:p>
+            <a:pPr marL="0" indent="0" algn="just">
+              <a:buNone/>
+            </a:pPr>
+            <a:r>
+              <a:rPr lang="en-US" b="1" dirty="0">
+                <a:latin typeface="Times New Roman" panose="02020603050405020304" pitchFamily="18" charset="0"/>
+                <a:cs typeface="Times New Roman" panose="02020603050405020304" pitchFamily="18" charset="0"/>
+              </a:rPr>
+              <a:t>Design and Optimization of Cloud Native Homomorphic Encryption Workflows for Privacy-Preserving ML Inference (2025)</a:t>
+            </a:r>
+          </a:p>
+          <a:p>
+            <a:pPr algn="just"/>
+            <a:r>
+              <a:rPr lang="en-US" sz="3000" dirty="0">
+                <a:latin typeface="Times New Roman" panose="02020603050405020304" pitchFamily="18" charset="0"/>
+                <a:cs typeface="Times New Roman" panose="02020603050405020304" pitchFamily="18" charset="0"/>
+              </a:rPr>
+              <a:t>This paper proposes a cloud-native framework to integrate homomorphic encryption into large-scale machine learning inference pipelines deployed on cloud infrastructures.</a:t>
+            </a:r>
+          </a:p>
+          <a:p>
+            <a:pPr algn="just"/>
+            <a:r>
+              <a:rPr lang="en-US" sz="3000" dirty="0">
+                <a:latin typeface="Times New Roman" panose="02020603050405020304" pitchFamily="18" charset="0"/>
+                <a:cs typeface="Times New Roman" panose="02020603050405020304" pitchFamily="18" charset="0"/>
+              </a:rPr>
+              <a:t>It focuses on optimizing HE workflows so that encrypted inference can be performed at scale and  addresses  challenges such as computational overhead and orchestration complexity.</a:t>
+            </a:r>
+          </a:p>
+          <a:p>
+            <a:pPr algn="just"/>
+            <a:r>
+              <a:rPr lang="en-US" sz="3000" dirty="0">
+                <a:latin typeface="Times New Roman" panose="02020603050405020304" pitchFamily="18" charset="0"/>
+                <a:cs typeface="Times New Roman" panose="02020603050405020304" pitchFamily="18" charset="0"/>
+              </a:rPr>
+              <a:t>They Applying optimization strategies such as Ciphertext packing to bundle many values into one encrypted </a:t>
+            </a:r>
+            <a:r>
+              <a:rPr lang="en-US" sz="3000" dirty="0" err="1">
+                <a:latin typeface="Times New Roman" panose="02020603050405020304" pitchFamily="18" charset="0"/>
+                <a:cs typeface="Times New Roman" panose="02020603050405020304" pitchFamily="18" charset="0"/>
+              </a:rPr>
+              <a:t>object,Polynomial</a:t>
+            </a:r>
+            <a:r>
+              <a:rPr lang="en-US" sz="3000" dirty="0">
+                <a:latin typeface="Times New Roman" panose="02020603050405020304" pitchFamily="18" charset="0"/>
+                <a:cs typeface="Times New Roman" panose="02020603050405020304" pitchFamily="18" charset="0"/>
+              </a:rPr>
+              <a:t> modulus adjustment to balance computation and Operator fusion to reduce redundant operations during inference.</a:t>
+            </a:r>
+            <a:endParaRPr lang="en-US" sz="3000" dirty="0"/>
+          </a:p>
+          <a:p>
+            <a:pPr algn="just"/>
+            <a:r>
+              <a:rPr lang="en-US" sz="3000" dirty="0">
+                <a:latin typeface="Times New Roman" panose="02020603050405020304" pitchFamily="18" charset="0"/>
+                <a:cs typeface="Times New Roman" panose="02020603050405020304" pitchFamily="18" charset="0"/>
+              </a:rPr>
+              <a:t>This paper  demonstrates that architectural and infrastructure level optimizations can significantly improve encrypted machine learning services however performance overhead relative to plaintext inference remains unavoidable.</a:t>
+            </a:r>
+            <a:endParaRPr lang="en-IN" sz="3000" dirty="0">
+              <a:latin typeface="Times New Roman" panose="02020603050405020304" pitchFamily="18" charset="0"/>
+              <a:cs typeface="Times New Roman" panose="02020603050405020304" pitchFamily="18" charset="0"/>
+            </a:endParaRPr>
+          </a:p>
+        </p:txBody>
+      </p:sp>
+    </p:spTree>
+    <p:extLst>
+      <p:ext uri="{BB962C8B-B14F-4D97-AF65-F5344CB8AC3E}">
+        <p14:creationId xmlns:p14="http://schemas.microsoft.com/office/powerpoint/2010/main" val="2149882992"/>
+      </p:ext>
+    </p:extLst>
+  </p:cSld>
+  <p:clrMapOvr>
+    <a:masterClrMapping/>
+  </p:clrMapOvr>
+</p:sld>
+</file>
+
+<file path=ppt/slides/slide12.xml><?xml version="1.0" encoding="utf-8"?>
+<p:sld xmlns:a="http://schemas.openxmlformats.org/drawingml/2006/main" xmlns:r="http://schemas.openxmlformats.org/officeDocument/2006/relationships" xmlns:p="http://schemas.openxmlformats.org/presentationml/2006/main">
+  <p:cSld>
+    <p:spTree>
+      <p:nvGrpSpPr>
+        <p:cNvPr id="1" name=""/>
+        <p:cNvGrpSpPr/>
+        <p:nvPr/>
+      </p:nvGrpSpPr>
+      <p:grpSpPr>
+        <a:xfrm>
+          <a:off x="0" y="0"/>
+          <a:ext cx="0" cy="0"/>
+          <a:chOff x="0" y="0"/>
+          <a:chExt cx="0" cy="0"/>
+        </a:xfrm>
+      </p:grpSpPr>
+      <p:sp>
+        <p:nvSpPr>
+          <p:cNvPr id="2" name="Title 1">
+            <a:extLst>
+              <a:ext uri="{FF2B5EF4-FFF2-40B4-BE49-F238E27FC236}">
+                <a16:creationId xmlns:a16="http://schemas.microsoft.com/office/drawing/2014/main" id="{C00A959C-D637-3F69-D42A-7D8BA04EDC6D}"/>
+              </a:ext>
+            </a:extLst>
+          </p:cNvPr>
+          <p:cNvSpPr>
+            <a:spLocks noGrp="1"/>
+          </p:cNvSpPr>
+          <p:nvPr>
+            <p:ph type="title"/>
+          </p:nvPr>
+        </p:nvSpPr>
+        <p:spPr>
+          <a:xfrm>
+            <a:off x="0" y="-219075"/>
+            <a:ext cx="10515600" cy="1325563"/>
+          </a:xfrm>
+        </p:spPr>
+        <p:txBody>
+          <a:bodyPr/>
+          <a:lstStyle/>
+          <a:p>
+            <a:r>
+              <a:rPr lang="en-IN" dirty="0">
+                <a:latin typeface="Times New Roman" panose="02020603050405020304" pitchFamily="18" charset="0"/>
+                <a:cs typeface="Times New Roman" panose="02020603050405020304" pitchFamily="18" charset="0"/>
+              </a:rPr>
+              <a:t>Literature Review </a:t>
+            </a:r>
+            <a:endParaRPr lang="en-IN" dirty="0"/>
+          </a:p>
+        </p:txBody>
+      </p:sp>
+      <p:sp>
+        <p:nvSpPr>
+          <p:cNvPr id="3" name="Content Placeholder 2">
+            <a:extLst>
+              <a:ext uri="{FF2B5EF4-FFF2-40B4-BE49-F238E27FC236}">
+                <a16:creationId xmlns:a16="http://schemas.microsoft.com/office/drawing/2014/main" id="{2E1EEA9A-E1A1-E31E-A58D-8327D8A71DDA}"/>
+              </a:ext>
+            </a:extLst>
+          </p:cNvPr>
+          <p:cNvSpPr>
+            <a:spLocks noGrp="1"/>
+          </p:cNvSpPr>
+          <p:nvPr>
+            <p:ph idx="1"/>
+          </p:nvPr>
+        </p:nvSpPr>
+        <p:spPr>
+          <a:xfrm>
+            <a:off x="143933" y="778933"/>
+            <a:ext cx="11209867" cy="5757334"/>
+          </a:xfrm>
+        </p:spPr>
+        <p:txBody>
+          <a:bodyPr>
+            <a:normAutofit fontScale="92500"/>
+          </a:bodyPr>
+          <a:lstStyle/>
+          <a:p>
+            <a:pPr marL="0" indent="0" algn="just">
+              <a:buNone/>
+            </a:pPr>
+            <a:r>
+              <a:rPr lang="en-US" b="1" dirty="0">
+                <a:latin typeface="Times New Roman" panose="02020603050405020304" pitchFamily="18" charset="0"/>
+                <a:cs typeface="Times New Roman" panose="02020603050405020304" pitchFamily="18" charset="0"/>
+              </a:rPr>
+              <a:t>DCT-</a:t>
+            </a:r>
+            <a:r>
+              <a:rPr lang="en-US" b="1" dirty="0" err="1">
+                <a:latin typeface="Times New Roman" panose="02020603050405020304" pitchFamily="18" charset="0"/>
+                <a:cs typeface="Times New Roman" panose="02020603050405020304" pitchFamily="18" charset="0"/>
+              </a:rPr>
+              <a:t>CryptoNets</a:t>
+            </a:r>
+            <a:r>
+              <a:rPr lang="en-US" b="1" dirty="0">
+                <a:latin typeface="Times New Roman" panose="02020603050405020304" pitchFamily="18" charset="0"/>
+                <a:cs typeface="Times New Roman" panose="02020603050405020304" pitchFamily="18" charset="0"/>
+              </a:rPr>
+              <a:t>: Scaling Private Inference in the Frequency Domain (2024</a:t>
+            </a:r>
+            <a:r>
+              <a:rPr lang="en-US" dirty="0">
+                <a:latin typeface="Times New Roman" panose="02020603050405020304" pitchFamily="18" charset="0"/>
+                <a:cs typeface="Times New Roman" panose="02020603050405020304" pitchFamily="18" charset="0"/>
+              </a:rPr>
+              <a:t>)</a:t>
+            </a:r>
+          </a:p>
+          <a:p>
+            <a:pPr algn="just"/>
+            <a:r>
+              <a:rPr lang="en-US" dirty="0">
+                <a:latin typeface="Times New Roman" panose="02020603050405020304" pitchFamily="18" charset="0"/>
+                <a:cs typeface="Times New Roman" panose="02020603050405020304" pitchFamily="18" charset="0"/>
+              </a:rPr>
+              <a:t>This paper proposes a framework designed to improve the efficiency of homomorphic encryption based neural network inference.</a:t>
+            </a:r>
+          </a:p>
+          <a:p>
+            <a:pPr algn="just"/>
+            <a:r>
+              <a:rPr lang="en-US" dirty="0">
+                <a:latin typeface="Times New Roman" panose="02020603050405020304" pitchFamily="18" charset="0"/>
+                <a:cs typeface="Times New Roman" panose="02020603050405020304" pitchFamily="18" charset="0"/>
+              </a:rPr>
+              <a:t>They perform encrypted inference in the </a:t>
+            </a:r>
+            <a:r>
+              <a:rPr lang="en-US" b="1" dirty="0">
+                <a:latin typeface="Times New Roman" panose="02020603050405020304" pitchFamily="18" charset="0"/>
+                <a:cs typeface="Times New Roman" panose="02020603050405020304" pitchFamily="18" charset="0"/>
+              </a:rPr>
+              <a:t>frequency domain</a:t>
+            </a:r>
+            <a:r>
+              <a:rPr lang="en-US" dirty="0">
+                <a:latin typeface="Times New Roman" panose="02020603050405020304" pitchFamily="18" charset="0"/>
+                <a:cs typeface="Times New Roman" panose="02020603050405020304" pitchFamily="18" charset="0"/>
+              </a:rPr>
+              <a:t> using the Discrete Cosine Transform (DCT)  enabling faster and more scalable privacy preserving machine learning. </a:t>
+            </a:r>
+          </a:p>
+          <a:p>
+            <a:pPr algn="just"/>
+            <a:r>
+              <a:rPr lang="en-US" dirty="0">
+                <a:latin typeface="Times New Roman" panose="02020603050405020304" pitchFamily="18" charset="0"/>
+                <a:cs typeface="Times New Roman" panose="02020603050405020304" pitchFamily="18" charset="0"/>
+              </a:rPr>
+              <a:t>The model processes encrypted frequency domain data instead of raw image pixels. </a:t>
+            </a:r>
+          </a:p>
+          <a:p>
+            <a:pPr algn="just"/>
+            <a:r>
+              <a:rPr lang="en-US" dirty="0">
+                <a:latin typeface="Times New Roman" panose="02020603050405020304" pitchFamily="18" charset="0"/>
+                <a:cs typeface="Times New Roman" panose="02020603050405020304" pitchFamily="18" charset="0"/>
+              </a:rPr>
+              <a:t>This approach reduces computational complexity because low frequency components carry most of the important information. </a:t>
+            </a:r>
+          </a:p>
+          <a:p>
+            <a:pPr algn="just"/>
+            <a:r>
+              <a:rPr lang="en-US" dirty="0">
+                <a:latin typeface="Times New Roman" panose="02020603050405020304" pitchFamily="18" charset="0"/>
+                <a:cs typeface="Times New Roman" panose="02020603050405020304" pitchFamily="18" charset="0"/>
+              </a:rPr>
+              <a:t>The study demonstrates that operating in the frequency domain can significantly enhance the practicality of homomorphic encryption for deep learning inference. Although encrypted inference still remains computationally intensive.</a:t>
+            </a:r>
+          </a:p>
+          <a:p>
+            <a:pPr algn="just"/>
+            <a:endParaRPr lang="en-IN" dirty="0">
+              <a:latin typeface="Times New Roman" panose="02020603050405020304" pitchFamily="18" charset="0"/>
+              <a:cs typeface="Times New Roman" panose="02020603050405020304" pitchFamily="18" charset="0"/>
+            </a:endParaRPr>
+          </a:p>
+        </p:txBody>
+      </p:sp>
+    </p:spTree>
+    <p:extLst>
+      <p:ext uri="{BB962C8B-B14F-4D97-AF65-F5344CB8AC3E}">
+        <p14:creationId xmlns:p14="http://schemas.microsoft.com/office/powerpoint/2010/main" val="3820143428"/>
+      </p:ext>
+    </p:extLst>
+  </p:cSld>
+  <p:clrMapOvr>
+    <a:masterClrMapping/>
+  </p:clrMapOvr>
+</p:sld>
+</file>
+
+<file path=ppt/slides/slide13.xml><?xml version="1.0" encoding="utf-8"?>
+<p:sld xmlns:a="http://schemas.openxmlformats.org/drawingml/2006/main" xmlns:r="http://schemas.openxmlformats.org/officeDocument/2006/relationships" xmlns:p="http://schemas.openxmlformats.org/presentationml/2006/main">
+  <p:cSld>
+    <p:spTree>
+      <p:nvGrpSpPr>
+        <p:cNvPr id="1" name=""/>
+        <p:cNvGrpSpPr/>
+        <p:nvPr/>
+      </p:nvGrpSpPr>
+      <p:grpSpPr>
+        <a:xfrm>
+          <a:off x="0" y="0"/>
+          <a:ext cx="0" cy="0"/>
+          <a:chOff x="0" y="0"/>
+          <a:chExt cx="0" cy="0"/>
+        </a:xfrm>
+      </p:grpSpPr>
+      <p:graphicFrame>
+        <p:nvGraphicFramePr>
+          <p:cNvPr id="7" name="Content Placeholder 6">
+            <a:extLst>
+              <a:ext uri="{FF2B5EF4-FFF2-40B4-BE49-F238E27FC236}">
+                <a16:creationId xmlns:a16="http://schemas.microsoft.com/office/drawing/2014/main" id="{2E9F253F-9F48-4FDF-5CA8-2D0AF5AA2DF4}"/>
+              </a:ext>
+            </a:extLst>
+          </p:cNvPr>
+          <p:cNvGraphicFramePr>
+            <a:graphicFrameLocks noGrp="1"/>
+          </p:cNvGraphicFramePr>
+          <p:nvPr>
+            <p:ph idx="1"/>
+            <p:extLst>
+              <p:ext uri="{D42A27DB-BD31-4B8C-83A1-F6EECF244321}">
+                <p14:modId xmlns:p14="http://schemas.microsoft.com/office/powerpoint/2010/main" val="372673071"/>
+              </p:ext>
+            </p:extLst>
+          </p:nvPr>
+        </p:nvGraphicFramePr>
+        <p:xfrm>
+          <a:off x="143933" y="143933"/>
+          <a:ext cx="11717870" cy="6997189"/>
+        </p:xfrm>
+        <a:graphic>
+          <a:graphicData uri="http://schemas.openxmlformats.org/drawingml/2006/table">
+            <a:tbl>
+              <a:tblPr/>
+              <a:tblGrid>
+                <a:gridCol w="2343574">
+                  <a:extLst>
+                    <a:ext uri="{9D8B030D-6E8A-4147-A177-3AD203B41FA5}">
+                      <a16:colId xmlns:a16="http://schemas.microsoft.com/office/drawing/2014/main" val="3193311418"/>
+                    </a:ext>
+                  </a:extLst>
+                </a:gridCol>
+                <a:gridCol w="2343574">
+                  <a:extLst>
+                    <a:ext uri="{9D8B030D-6E8A-4147-A177-3AD203B41FA5}">
+                      <a16:colId xmlns:a16="http://schemas.microsoft.com/office/drawing/2014/main" val="3187101675"/>
+                    </a:ext>
+                  </a:extLst>
+                </a:gridCol>
+                <a:gridCol w="2343574">
+                  <a:extLst>
+                    <a:ext uri="{9D8B030D-6E8A-4147-A177-3AD203B41FA5}">
+                      <a16:colId xmlns:a16="http://schemas.microsoft.com/office/drawing/2014/main" val="2778157625"/>
+                    </a:ext>
+                  </a:extLst>
+                </a:gridCol>
+                <a:gridCol w="2343574">
+                  <a:extLst>
+                    <a:ext uri="{9D8B030D-6E8A-4147-A177-3AD203B41FA5}">
+                      <a16:colId xmlns:a16="http://schemas.microsoft.com/office/drawing/2014/main" val="3878977448"/>
+                    </a:ext>
+                  </a:extLst>
+                </a:gridCol>
+                <a:gridCol w="2343574">
+                  <a:extLst>
+                    <a:ext uri="{9D8B030D-6E8A-4147-A177-3AD203B41FA5}">
+                      <a16:colId xmlns:a16="http://schemas.microsoft.com/office/drawing/2014/main" val="3027726652"/>
+                    </a:ext>
+                  </a:extLst>
+                </a:gridCol>
+              </a:tblGrid>
+              <a:tr h="230637">
+                <a:tc>
+                  <a:txBody>
+                    <a:bodyPr/>
+                    <a:lstStyle/>
+                    <a:p>
+                      <a:pPr>
+                        <a:buNone/>
+                      </a:pPr>
+                      <a:r>
+                        <a:rPr lang="en-IN" sz="1400" b="1" dirty="0"/>
+                        <a:t>Author &amp; Year</a:t>
+                      </a:r>
+                    </a:p>
+                  </a:txBody>
+                  <a:tcPr marL="29466" marR="29466" marT="14733" marB="14733" anchor="ctr">
+                    <a:lnL>
+                      <a:noFill/>
+                    </a:lnL>
+                    <a:lnR>
+                      <a:noFill/>
+                    </a:lnR>
+                    <a:lnT>
+                      <a:noFill/>
+                    </a:lnT>
+                    <a:lnB>
+                      <a:noFill/>
+                    </a:lnB>
+                    <a:noFill/>
+                  </a:tcPr>
+                </a:tc>
+                <a:tc>
+                  <a:txBody>
+                    <a:bodyPr/>
+                    <a:lstStyle/>
+                    <a:p>
+                      <a:pPr>
+                        <a:buNone/>
+                      </a:pPr>
+                      <a:r>
+                        <a:rPr lang="en-IN" sz="1400" b="1"/>
+                        <a:t>Datasets (Source &amp; Size)</a:t>
+                      </a:r>
+                    </a:p>
+                  </a:txBody>
+                  <a:tcPr marL="29466" marR="29466" marT="14733" marB="14733" anchor="ctr">
+                    <a:lnL>
+                      <a:noFill/>
+                    </a:lnL>
+                    <a:lnR>
+                      <a:noFill/>
+                    </a:lnR>
+                    <a:lnT>
+                      <a:noFill/>
+                    </a:lnT>
+                    <a:lnB>
+                      <a:noFill/>
+                    </a:lnB>
+                    <a:noFill/>
+                  </a:tcPr>
+                </a:tc>
+                <a:tc>
+                  <a:txBody>
+                    <a:bodyPr/>
+                    <a:lstStyle/>
+                    <a:p>
+                      <a:pPr>
+                        <a:buNone/>
+                      </a:pPr>
+                      <a:r>
+                        <a:rPr lang="en-IN" sz="1400" b="1"/>
+                        <a:t>Methodology</a:t>
+                      </a:r>
+                    </a:p>
+                  </a:txBody>
+                  <a:tcPr marL="29466" marR="29466" marT="14733" marB="14733" anchor="ctr">
+                    <a:lnL>
+                      <a:noFill/>
+                    </a:lnL>
+                    <a:lnR>
+                      <a:noFill/>
+                    </a:lnR>
+                    <a:lnT>
+                      <a:noFill/>
+                    </a:lnT>
+                    <a:lnB>
+                      <a:noFill/>
+                    </a:lnB>
+                    <a:noFill/>
+                  </a:tcPr>
+                </a:tc>
+                <a:tc>
+                  <a:txBody>
+                    <a:bodyPr/>
+                    <a:lstStyle/>
+                    <a:p>
+                      <a:pPr>
+                        <a:buNone/>
+                      </a:pPr>
+                      <a:r>
+                        <a:rPr lang="en-IN" sz="1400" b="1"/>
+                        <a:t>Pros</a:t>
+                      </a:r>
+                    </a:p>
+                  </a:txBody>
+                  <a:tcPr marL="29466" marR="29466" marT="14733" marB="14733" anchor="ctr">
+                    <a:lnL>
+                      <a:noFill/>
+                    </a:lnL>
+                    <a:lnR>
+                      <a:noFill/>
+                    </a:lnR>
+                    <a:lnT>
+                      <a:noFill/>
+                    </a:lnT>
+                    <a:lnB>
+                      <a:noFill/>
+                    </a:lnB>
+                    <a:noFill/>
+                  </a:tcPr>
+                </a:tc>
+                <a:tc>
+                  <a:txBody>
+                    <a:bodyPr/>
+                    <a:lstStyle/>
+                    <a:p>
+                      <a:pPr>
+                        <a:buNone/>
+                      </a:pPr>
+                      <a:r>
+                        <a:rPr lang="en-IN" sz="1400" b="1" dirty="0"/>
+                        <a:t>Cons / Limitations</a:t>
+                      </a:r>
+                    </a:p>
+                  </a:txBody>
+                  <a:tcPr marL="29466" marR="29466" marT="14733" marB="14733" anchor="ctr">
+                    <a:lnL>
+                      <a:noFill/>
+                    </a:lnL>
+                    <a:lnR>
+                      <a:noFill/>
+                    </a:lnR>
+                    <a:lnT>
+                      <a:noFill/>
+                    </a:lnT>
+                    <a:lnB>
+                      <a:noFill/>
+                    </a:lnB>
+                    <a:noFill/>
+                  </a:tcPr>
+                </a:tc>
+                <a:extLst>
+                  <a:ext uri="{0D108BD9-81ED-4DB2-BD59-A6C34878D82A}">
+                    <a16:rowId xmlns:a16="http://schemas.microsoft.com/office/drawing/2014/main" val="1914299760"/>
+                  </a:ext>
+                </a:extLst>
+              </a:tr>
+              <a:tr h="2009835">
+                <a:tc>
+                  <a:txBody>
+                    <a:bodyPr/>
+                    <a:lstStyle/>
+                    <a:p>
+                      <a:pPr>
+                        <a:buNone/>
+                      </a:pPr>
+                      <a:r>
+                        <a:rPr lang="en-IN" sz="1050" b="1" dirty="0" err="1"/>
+                        <a:t>PrivSpike</a:t>
+                      </a:r>
+                      <a:r>
+                        <a:rPr lang="en-IN" sz="1050" b="1" dirty="0"/>
+                        <a:t> (2025)</a:t>
+                      </a:r>
+                      <a:endParaRPr lang="en-IN" sz="1050" dirty="0"/>
+                    </a:p>
+                  </a:txBody>
+                  <a:tcPr marL="29466" marR="29466" marT="14733" marB="14733" anchor="ctr">
+                    <a:lnL>
+                      <a:noFill/>
+                    </a:lnL>
+                    <a:lnR>
+                      <a:noFill/>
+                    </a:lnR>
+                    <a:lnT>
+                      <a:noFill/>
+                    </a:lnT>
+                    <a:lnB>
+                      <a:noFill/>
+                    </a:lnB>
+                    <a:noFill/>
+                  </a:tcPr>
+                </a:tc>
+                <a:tc>
+                  <a:txBody>
+                    <a:bodyPr/>
+                    <a:lstStyle/>
+                    <a:p>
+                      <a:pPr>
+                        <a:buNone/>
+                      </a:pPr>
+                      <a:r>
+                        <a:rPr lang="en-IN" sz="1200" dirty="0"/>
+                        <a:t>MNIST (~70,000 images), CIFAR-10 (~60,000 images), Neuromorphic variants (event-based datasets)</a:t>
+                      </a:r>
+                    </a:p>
+                  </a:txBody>
+                  <a:tcPr marL="29466" marR="29466" marT="14733" marB="14733" anchor="ctr">
+                    <a:lnL>
+                      <a:noFill/>
+                    </a:lnL>
+                    <a:lnR>
+                      <a:noFill/>
+                    </a:lnR>
+                    <a:lnT>
+                      <a:noFill/>
+                    </a:lnT>
+                    <a:lnB>
+                      <a:noFill/>
+                    </a:lnB>
+                    <a:noFill/>
+                  </a:tcPr>
+                </a:tc>
+                <a:tc>
+                  <a:txBody>
+                    <a:bodyPr/>
+                    <a:lstStyle/>
+                    <a:p>
+                      <a:pPr>
+                        <a:buNone/>
+                      </a:pPr>
+                      <a:r>
+                        <a:rPr lang="en-IN" sz="1200" dirty="0"/>
+                        <a:t>Performs encrypted inference on Spiking Neural Networks using CKKS homomorphic encryption. Replaces neuron activation dynamics with polynomial approximations. Introduces optimized encrypted evaluation and scheme-switching for precision control.</a:t>
+                      </a:r>
+                    </a:p>
+                  </a:txBody>
+                  <a:tcPr marL="29466" marR="29466" marT="14733" marB="14733" anchor="ctr">
+                    <a:lnL>
+                      <a:noFill/>
+                    </a:lnL>
+                    <a:lnR>
+                      <a:noFill/>
+                    </a:lnR>
+                    <a:lnT>
+                      <a:noFill/>
+                    </a:lnT>
+                    <a:lnB>
+                      <a:noFill/>
+                    </a:lnB>
+                    <a:noFill/>
+                  </a:tcPr>
+                </a:tc>
+                <a:tc>
+                  <a:txBody>
+                    <a:bodyPr/>
+                    <a:lstStyle/>
+                    <a:p>
+                      <a:pPr>
+                        <a:buNone/>
+                      </a:pPr>
+                      <a:r>
+                        <a:rPr lang="en-US" sz="1200"/>
+                        <a:t>Supports deep neuromorphic models. High classification accuracy under encryption. Demonstrates feasibility of encrypted inference for biologically inspired networks.</a:t>
+                      </a:r>
+                    </a:p>
+                  </a:txBody>
+                  <a:tcPr marL="29466" marR="29466" marT="14733" marB="14733" anchor="ctr">
+                    <a:lnL>
+                      <a:noFill/>
+                    </a:lnL>
+                    <a:lnR>
+                      <a:noFill/>
+                    </a:lnR>
+                    <a:lnT>
+                      <a:noFill/>
+                    </a:lnT>
+                    <a:lnB>
+                      <a:noFill/>
+                    </a:lnB>
+                    <a:noFill/>
+                  </a:tcPr>
+                </a:tc>
+                <a:tc>
+                  <a:txBody>
+                    <a:bodyPr/>
+                    <a:lstStyle/>
+                    <a:p>
+                      <a:pPr>
+                        <a:buNone/>
+                      </a:pPr>
+                      <a:r>
+                        <a:rPr lang="en-US" sz="1200" dirty="0"/>
+                        <a:t>Very high inference time, especially for deeper models. Polynomial approximation introduces numerical error. Computational overhead remains significant.</a:t>
+                      </a:r>
+                    </a:p>
+                  </a:txBody>
+                  <a:tcPr marL="29466" marR="29466" marT="14733" marB="14733" anchor="ctr">
+                    <a:lnL>
+                      <a:noFill/>
+                    </a:lnL>
+                    <a:lnR>
+                      <a:noFill/>
+                    </a:lnR>
+                    <a:lnT>
+                      <a:noFill/>
+                    </a:lnT>
+                    <a:lnB>
+                      <a:noFill/>
+                    </a:lnB>
+                    <a:noFill/>
+                  </a:tcPr>
+                </a:tc>
+                <a:extLst>
+                  <a:ext uri="{0D108BD9-81ED-4DB2-BD59-A6C34878D82A}">
+                    <a16:rowId xmlns:a16="http://schemas.microsoft.com/office/drawing/2014/main" val="4204235459"/>
+                  </a:ext>
+                </a:extLst>
+              </a:tr>
+              <a:tr h="1317925">
+                <a:tc>
+                  <a:txBody>
+                    <a:bodyPr/>
+                    <a:lstStyle/>
+                    <a:p>
+                      <a:pPr>
+                        <a:buNone/>
+                      </a:pPr>
+                      <a:r>
+                        <a:rPr lang="en-US" sz="1050" b="1" dirty="0"/>
+                        <a:t>Design &amp; Optimization of Cloud-Native HE Workflows (2025)</a:t>
+                      </a:r>
+                      <a:endParaRPr lang="en-US" sz="1050" dirty="0"/>
+                    </a:p>
+                  </a:txBody>
+                  <a:tcPr marL="29466" marR="29466" marT="14733" marB="14733" anchor="ctr">
+                    <a:lnL>
+                      <a:noFill/>
+                    </a:lnL>
+                    <a:lnR>
+                      <a:noFill/>
+                    </a:lnR>
+                    <a:lnT>
+                      <a:noFill/>
+                    </a:lnT>
+                    <a:lnB>
+                      <a:noFill/>
+                    </a:lnB>
+                    <a:noFill/>
+                  </a:tcPr>
+                </a:tc>
+                <a:tc>
+                  <a:txBody>
+                    <a:bodyPr/>
+                    <a:lstStyle/>
+                    <a:p>
+                      <a:pPr>
+                        <a:buNone/>
+                      </a:pPr>
+                      <a:r>
+                        <a:rPr lang="en-US" sz="1050" dirty="0"/>
+                        <a:t>Experimental cloud-based evaluation datasets (ML inference workloads deployed across distributed infrastructure; size varies by deployment configuration)</a:t>
+                      </a:r>
+                    </a:p>
+                  </a:txBody>
+                  <a:tcPr marL="29466" marR="29466" marT="14733" marB="14733" anchor="ctr">
+                    <a:lnL>
+                      <a:noFill/>
+                    </a:lnL>
+                    <a:lnR>
+                      <a:noFill/>
+                    </a:lnR>
+                    <a:lnT>
+                      <a:noFill/>
+                    </a:lnT>
+                    <a:lnB>
+                      <a:noFill/>
+                    </a:lnB>
+                    <a:noFill/>
+                  </a:tcPr>
+                </a:tc>
+                <a:tc>
+                  <a:txBody>
+                    <a:bodyPr/>
+                    <a:lstStyle/>
+                    <a:p>
+                      <a:pPr>
+                        <a:buNone/>
+                      </a:pPr>
+                      <a:r>
+                        <a:rPr lang="en-IN" sz="1100"/>
+                        <a:t>Builds containerized homomorphic encryption pipeline deployed via Kubernetes. Uses ciphertext packing, operator fusion, and distributed orchestration to optimize encrypted inference at cloud scale.</a:t>
+                      </a:r>
+                    </a:p>
+                  </a:txBody>
+                  <a:tcPr marL="29466" marR="29466" marT="14733" marB="14733" anchor="ctr">
+                    <a:lnL>
+                      <a:noFill/>
+                    </a:lnL>
+                    <a:lnR>
+                      <a:noFill/>
+                    </a:lnR>
+                    <a:lnT>
+                      <a:noFill/>
+                    </a:lnT>
+                    <a:lnB>
+                      <a:noFill/>
+                    </a:lnB>
+                    <a:noFill/>
+                  </a:tcPr>
+                </a:tc>
+                <a:tc>
+                  <a:txBody>
+                    <a:bodyPr/>
+                    <a:lstStyle/>
+                    <a:p>
+                      <a:pPr>
+                        <a:buNone/>
+                      </a:pPr>
+                      <a:r>
+                        <a:rPr lang="en-US" sz="1100"/>
+                        <a:t>Improves scalability and deployment practicality. Significant speed and memory efficiency gains over traditional HE workflows. Demonstrates real-world system integration.</a:t>
+                      </a:r>
+                    </a:p>
+                  </a:txBody>
+                  <a:tcPr marL="29466" marR="29466" marT="14733" marB="14733" anchor="ctr">
+                    <a:lnL>
+                      <a:noFill/>
+                    </a:lnL>
+                    <a:lnR>
+                      <a:noFill/>
+                    </a:lnR>
+                    <a:lnT>
+                      <a:noFill/>
+                    </a:lnT>
+                    <a:lnB>
+                      <a:noFill/>
+                    </a:lnB>
+                    <a:noFill/>
+                  </a:tcPr>
+                </a:tc>
+                <a:tc>
+                  <a:txBody>
+                    <a:bodyPr/>
+                    <a:lstStyle/>
+                    <a:p>
+                      <a:pPr>
+                        <a:buNone/>
+                      </a:pPr>
+                      <a:r>
+                        <a:rPr lang="en-US" sz="1100" dirty="0"/>
+                        <a:t>Still slower than plaintext inference. Requires complex infrastructure setup. Focuses on system architecture rather than improving core encryption efficiency.</a:t>
+                      </a:r>
+                    </a:p>
+                  </a:txBody>
+                  <a:tcPr marL="29466" marR="29466" marT="14733" marB="14733" anchor="ctr">
+                    <a:lnL>
+                      <a:noFill/>
+                    </a:lnL>
+                    <a:lnR>
+                      <a:noFill/>
+                    </a:lnR>
+                    <a:lnT>
+                      <a:noFill/>
+                    </a:lnT>
+                    <a:lnB>
+                      <a:noFill/>
+                    </a:lnB>
+                    <a:noFill/>
+                  </a:tcPr>
+                </a:tc>
+                <a:extLst>
+                  <a:ext uri="{0D108BD9-81ED-4DB2-BD59-A6C34878D82A}">
+                    <a16:rowId xmlns:a16="http://schemas.microsoft.com/office/drawing/2014/main" val="2981962233"/>
+                  </a:ext>
+                </a:extLst>
+              </a:tr>
+              <a:tr h="1812145">
+                <a:tc>
+                  <a:txBody>
+                    <a:bodyPr/>
+                    <a:lstStyle/>
+                    <a:p>
+                      <a:pPr>
+                        <a:buNone/>
+                      </a:pPr>
+                      <a:r>
+                        <a:rPr lang="en-IN" sz="1050" b="1" dirty="0"/>
+                        <a:t>DCT-</a:t>
+                      </a:r>
+                      <a:r>
+                        <a:rPr lang="en-IN" sz="1050" b="1" dirty="0" err="1"/>
+                        <a:t>CryptoNets</a:t>
+                      </a:r>
+                      <a:r>
+                        <a:rPr lang="en-IN" sz="1050" b="1" dirty="0"/>
+                        <a:t> (2024)</a:t>
+                      </a:r>
+                      <a:endParaRPr lang="en-IN" sz="1050" dirty="0"/>
+                    </a:p>
+                  </a:txBody>
+                  <a:tcPr marL="29466" marR="29466" marT="14733" marB="14733" anchor="ctr">
+                    <a:lnL>
+                      <a:noFill/>
+                    </a:lnL>
+                    <a:lnR>
+                      <a:noFill/>
+                    </a:lnR>
+                    <a:lnT>
+                      <a:noFill/>
+                    </a:lnT>
+                    <a:lnB>
+                      <a:noFill/>
+                    </a:lnB>
+                    <a:noFill/>
+                  </a:tcPr>
+                </a:tc>
+                <a:tc>
+                  <a:txBody>
+                    <a:bodyPr/>
+                    <a:lstStyle/>
+                    <a:p>
+                      <a:pPr>
+                        <a:buNone/>
+                      </a:pPr>
+                      <a:r>
+                        <a:rPr lang="en-IN" sz="1050" dirty="0"/>
+                        <a:t>ImageNet (large scale image dataset), standard image classification benchmarks</a:t>
+                      </a:r>
+                    </a:p>
+                  </a:txBody>
+                  <a:tcPr marL="29466" marR="29466" marT="14733" marB="14733" anchor="ctr">
+                    <a:lnL>
+                      <a:noFill/>
+                    </a:lnL>
+                    <a:lnR>
+                      <a:noFill/>
+                    </a:lnR>
+                    <a:lnT>
+                      <a:noFill/>
+                    </a:lnT>
+                    <a:lnB>
+                      <a:noFill/>
+                    </a:lnB>
+                    <a:noFill/>
+                  </a:tcPr>
+                </a:tc>
+                <a:tc>
+                  <a:txBody>
+                    <a:bodyPr/>
+                    <a:lstStyle/>
+                    <a:p>
+                      <a:pPr>
+                        <a:buNone/>
+                      </a:pPr>
+                      <a:r>
+                        <a:rPr lang="en-IN" sz="1100" dirty="0"/>
+                        <a:t>Converts input data into frequency domain using Discrete Cosine Transform before encryption. Processes low frequency components to reduce computational load. Reduces nonlinear operations and bootstrapping requirements in encrypted neural networks.</a:t>
+                      </a:r>
+                    </a:p>
+                  </a:txBody>
+                  <a:tcPr marL="29466" marR="29466" marT="14733" marB="14733" anchor="ctr">
+                    <a:lnL>
+                      <a:noFill/>
+                    </a:lnL>
+                    <a:lnR>
+                      <a:noFill/>
+                    </a:lnR>
+                    <a:lnT>
+                      <a:noFill/>
+                    </a:lnT>
+                    <a:lnB>
+                      <a:noFill/>
+                    </a:lnB>
+                    <a:noFill/>
+                  </a:tcPr>
+                </a:tc>
+                <a:tc>
+                  <a:txBody>
+                    <a:bodyPr/>
+                    <a:lstStyle/>
+                    <a:p>
+                      <a:pPr>
+                        <a:buNone/>
+                      </a:pPr>
+                      <a:r>
+                        <a:rPr lang="en-US" sz="1100"/>
+                        <a:t>Major reduction in inference latency. Improved numerical stability. Enables more scalable encrypted CNN inference.</a:t>
+                      </a:r>
+                    </a:p>
+                  </a:txBody>
+                  <a:tcPr marL="29466" marR="29466" marT="14733" marB="14733" anchor="ctr">
+                    <a:lnL>
+                      <a:noFill/>
+                    </a:lnL>
+                    <a:lnR>
+                      <a:noFill/>
+                    </a:lnR>
+                    <a:lnT>
+                      <a:noFill/>
+                    </a:lnT>
+                    <a:lnB>
+                      <a:noFill/>
+                    </a:lnB>
+                    <a:noFill/>
+                  </a:tcPr>
+                </a:tc>
+                <a:tc>
+                  <a:txBody>
+                    <a:bodyPr/>
+                    <a:lstStyle/>
+                    <a:p>
+                      <a:pPr>
+                        <a:buNone/>
+                      </a:pPr>
+                      <a:r>
+                        <a:rPr lang="en-US" sz="1100" dirty="0"/>
+                        <a:t>Limited to image-based models. Additional preprocessing complexity. Still computationally intensive compared to plaintext methods.</a:t>
+                      </a:r>
+                    </a:p>
+                  </a:txBody>
+                  <a:tcPr marL="29466" marR="29466" marT="14733" marB="14733" anchor="ctr">
+                    <a:lnL>
+                      <a:noFill/>
+                    </a:lnL>
+                    <a:lnR>
+                      <a:noFill/>
+                    </a:lnR>
+                    <a:lnT>
+                      <a:noFill/>
+                    </a:lnT>
+                    <a:lnB>
+                      <a:noFill/>
+                    </a:lnB>
+                    <a:noFill/>
+                  </a:tcPr>
+                </a:tc>
+                <a:extLst>
+                  <a:ext uri="{0D108BD9-81ED-4DB2-BD59-A6C34878D82A}">
+                    <a16:rowId xmlns:a16="http://schemas.microsoft.com/office/drawing/2014/main" val="2514833811"/>
+                  </a:ext>
+                </a:extLst>
+              </a:tr>
+              <a:tr h="1614458">
+                <a:tc>
+                  <a:txBody>
+                    <a:bodyPr/>
+                    <a:lstStyle/>
+                    <a:p>
+                      <a:pPr>
+                        <a:buNone/>
+                      </a:pPr>
+                      <a:r>
+                        <a:rPr lang="en-IN" sz="1050" b="1" dirty="0"/>
+                        <a:t>HE-LRM (2025)</a:t>
+                      </a:r>
+                      <a:endParaRPr lang="en-IN" sz="1050" dirty="0"/>
+                    </a:p>
+                  </a:txBody>
+                  <a:tcPr marL="29466" marR="29466" marT="14733" marB="14733" anchor="ctr">
+                    <a:lnL>
+                      <a:noFill/>
+                    </a:lnL>
+                    <a:lnR>
+                      <a:noFill/>
+                    </a:lnR>
+                    <a:lnT>
+                      <a:noFill/>
+                    </a:lnT>
+                    <a:lnB>
+                      <a:noFill/>
+                    </a:lnB>
+                    <a:noFill/>
+                  </a:tcPr>
+                </a:tc>
+                <a:tc>
+                  <a:txBody>
+                    <a:bodyPr/>
+                    <a:lstStyle/>
+                    <a:p>
+                      <a:pPr>
+                        <a:buNone/>
+                      </a:pPr>
+                      <a:r>
+                        <a:rPr lang="en-US" sz="1050" dirty="0"/>
+                        <a:t>UCI health dataset (moderate tabular size), Criteo click-through rate dataset (~45 million samples)</a:t>
+                      </a:r>
+                    </a:p>
+                  </a:txBody>
+                  <a:tcPr marL="29466" marR="29466" marT="14733" marB="14733" anchor="ctr">
+                    <a:lnL>
+                      <a:noFill/>
+                    </a:lnL>
+                    <a:lnR>
+                      <a:noFill/>
+                    </a:lnR>
+                    <a:lnT>
+                      <a:noFill/>
+                    </a:lnT>
+                    <a:lnB>
+                      <a:noFill/>
+                    </a:lnB>
+                    <a:noFill/>
+                  </a:tcPr>
+                </a:tc>
+                <a:tc>
+                  <a:txBody>
+                    <a:bodyPr/>
+                    <a:lstStyle/>
+                    <a:p>
+                      <a:pPr>
+                        <a:buNone/>
+                      </a:pPr>
+                      <a:r>
+                        <a:rPr lang="en-IN" sz="1100" dirty="0"/>
+                        <a:t>Implements encrypted inference for deep learning recommendation models using CKKS. Introduces embedding compression and multi-embedding packing. Integrates into Orion FHE framework.</a:t>
+                      </a:r>
+                    </a:p>
+                  </a:txBody>
+                  <a:tcPr marL="29466" marR="29466" marT="14733" marB="14733" anchor="ctr">
+                    <a:lnL>
+                      <a:noFill/>
+                    </a:lnL>
+                    <a:lnR>
+                      <a:noFill/>
+                    </a:lnR>
+                    <a:lnT>
+                      <a:noFill/>
+                    </a:lnT>
+                    <a:lnB>
+                      <a:noFill/>
+                    </a:lnB>
+                    <a:noFill/>
+                  </a:tcPr>
+                </a:tc>
+                <a:tc>
+                  <a:txBody>
+                    <a:bodyPr/>
+                    <a:lstStyle/>
+                    <a:p>
+                      <a:pPr>
+                        <a:buNone/>
+                      </a:pPr>
+                      <a:r>
+                        <a:rPr lang="en-US" sz="1100"/>
+                        <a:t>Handles large sparse feature spaces. Significant speed improvements from embedding compression. Supports real-world recommendation tasks.</a:t>
+                      </a:r>
+                    </a:p>
+                  </a:txBody>
+                  <a:tcPr marL="29466" marR="29466" marT="14733" marB="14733" anchor="ctr">
+                    <a:lnL>
+                      <a:noFill/>
+                    </a:lnL>
+                    <a:lnR>
+                      <a:noFill/>
+                    </a:lnR>
+                    <a:lnT>
+                      <a:noFill/>
+                    </a:lnT>
+                    <a:lnB>
+                      <a:noFill/>
+                    </a:lnB>
+                    <a:noFill/>
+                  </a:tcPr>
+                </a:tc>
+                <a:tc>
+                  <a:txBody>
+                    <a:bodyPr/>
+                    <a:lstStyle/>
+                    <a:p>
+                      <a:pPr>
+                        <a:buNone/>
+                      </a:pPr>
+                      <a:r>
+                        <a:rPr lang="en-US" sz="1100" dirty="0"/>
+                        <a:t>High latency for large datasets. Embedding operations still expensive. Requires specialized optimization and potential hardware acceleration.</a:t>
+                      </a:r>
+                    </a:p>
+                  </a:txBody>
+                  <a:tcPr marL="29466" marR="29466" marT="14733" marB="14733" anchor="ctr">
+                    <a:lnL>
+                      <a:noFill/>
+                    </a:lnL>
+                    <a:lnR>
+                      <a:noFill/>
+                    </a:lnR>
+                    <a:lnT>
+                      <a:noFill/>
+                    </a:lnT>
+                    <a:lnB>
+                      <a:noFill/>
+                    </a:lnB>
+                    <a:noFill/>
+                  </a:tcPr>
+                </a:tc>
+                <a:extLst>
+                  <a:ext uri="{0D108BD9-81ED-4DB2-BD59-A6C34878D82A}">
+                    <a16:rowId xmlns:a16="http://schemas.microsoft.com/office/drawing/2014/main" val="2114222814"/>
+                  </a:ext>
+                </a:extLst>
+              </a:tr>
+            </a:tbl>
+          </a:graphicData>
+        </a:graphic>
+      </p:graphicFrame>
+    </p:spTree>
+    <p:extLst>
+      <p:ext uri="{BB962C8B-B14F-4D97-AF65-F5344CB8AC3E}">
+        <p14:creationId xmlns:p14="http://schemas.microsoft.com/office/powerpoint/2010/main" val="2530387512"/>
+      </p:ext>
+    </p:extLst>
+  </p:cSld>
+  <p:clrMapOvr>
+    <a:masterClrMapping/>
+  </p:clrMapOvr>
+</p:sld>
+</file>
+
+<file path=ppt/slides/slide14.xml><?xml version="1.0" encoding="utf-8"?>
+<p:sld xmlns:a="http://schemas.openxmlformats.org/drawingml/2006/main" xmlns:r="http://schemas.openxmlformats.org/officeDocument/2006/relationships" xmlns:p="http://schemas.openxmlformats.org/presentationml/2006/main">
+  <p:cSld>
+    <p:spTree>
+      <p:nvGrpSpPr>
+        <p:cNvPr id="1" name=""/>
+        <p:cNvGrpSpPr/>
+        <p:nvPr/>
+      </p:nvGrpSpPr>
+      <p:grpSpPr>
+        <a:xfrm>
+          <a:off x="0" y="0"/>
+          <a:ext cx="0" cy="0"/>
+          <a:chOff x="0" y="0"/>
+          <a:chExt cx="0" cy="0"/>
+        </a:xfrm>
+      </p:grpSpPr>
+      <p:sp>
+        <p:nvSpPr>
+          <p:cNvPr id="2" name="Title 1">
+            <a:extLst>
+              <a:ext uri="{FF2B5EF4-FFF2-40B4-BE49-F238E27FC236}">
+                <a16:creationId xmlns:a16="http://schemas.microsoft.com/office/drawing/2014/main" id="{C5EA1533-4BE1-DF5E-D485-BD167C2BD85D}"/>
+              </a:ext>
+            </a:extLst>
+          </p:cNvPr>
+          <p:cNvSpPr>
+            <a:spLocks noGrp="1"/>
+          </p:cNvSpPr>
+          <p:nvPr>
+            <p:ph type="title"/>
+          </p:nvPr>
+        </p:nvSpPr>
+        <p:spPr>
+          <a:xfrm>
+            <a:off x="0" y="-69574"/>
+            <a:ext cx="10515600" cy="1004888"/>
+          </a:xfrm>
+        </p:spPr>
+        <p:txBody>
+          <a:bodyPr/>
+          <a:lstStyle/>
+          <a:p>
+            <a:r>
+              <a:rPr lang="en-IN" dirty="0">
+                <a:latin typeface="Times New Roman" panose="02020603050405020304" pitchFamily="18" charset="0"/>
+                <a:cs typeface="Times New Roman" panose="02020603050405020304" pitchFamily="18" charset="0"/>
+              </a:rPr>
+              <a:t>Problem Statement</a:t>
+            </a:r>
+          </a:p>
+        </p:txBody>
+      </p:sp>
+      <p:sp>
+        <p:nvSpPr>
+          <p:cNvPr id="3" name="Content Placeholder 2">
+            <a:extLst>
+              <a:ext uri="{FF2B5EF4-FFF2-40B4-BE49-F238E27FC236}">
+                <a16:creationId xmlns:a16="http://schemas.microsoft.com/office/drawing/2014/main" id="{CB024CC5-00AF-876C-F7CA-146754384CB0}"/>
+              </a:ext>
+            </a:extLst>
+          </p:cNvPr>
+          <p:cNvSpPr>
+            <a:spLocks noGrp="1"/>
+          </p:cNvSpPr>
+          <p:nvPr>
+            <p:ph idx="1"/>
+          </p:nvPr>
+        </p:nvSpPr>
+        <p:spPr>
+          <a:xfrm>
+            <a:off x="79514" y="1222513"/>
+            <a:ext cx="11618842" cy="5406887"/>
+          </a:xfrm>
+        </p:spPr>
+        <p:txBody>
+          <a:bodyPr>
+            <a:normAutofit lnSpcReduction="10000"/>
+          </a:bodyPr>
+          <a:lstStyle/>
+          <a:p>
+            <a:pPr algn="just"/>
+            <a:r>
+              <a:rPr lang="en-US" dirty="0">
+                <a:latin typeface="Times New Roman" panose="02020603050405020304" pitchFamily="18" charset="0"/>
+                <a:cs typeface="Times New Roman" panose="02020603050405020304" pitchFamily="18" charset="0"/>
+              </a:rPr>
+              <a:t>Traditional machine learning models require access to unencrypted data, which creates privacy risks for sensitive information.</a:t>
+            </a:r>
+          </a:p>
+          <a:p>
+            <a:pPr algn="just"/>
+            <a:endParaRPr lang="en-US" dirty="0">
+              <a:latin typeface="Times New Roman" panose="02020603050405020304" pitchFamily="18" charset="0"/>
+              <a:cs typeface="Times New Roman" panose="02020603050405020304" pitchFamily="18" charset="0"/>
+            </a:endParaRPr>
+          </a:p>
+          <a:p>
+            <a:pPr algn="just"/>
+            <a:r>
+              <a:rPr lang="en-US" dirty="0">
+                <a:latin typeface="Times New Roman" panose="02020603050405020304" pitchFamily="18" charset="0"/>
+                <a:cs typeface="Times New Roman" panose="02020603050405020304" pitchFamily="18" charset="0"/>
+              </a:rPr>
+              <a:t>Existing encryption-based approaches are promising but often slow and computationally expensive, making them difficult to use in real world scenarios.</a:t>
+            </a:r>
+          </a:p>
+          <a:p>
+            <a:pPr algn="just"/>
+            <a:endParaRPr lang="en-US" dirty="0">
+              <a:latin typeface="Times New Roman" panose="02020603050405020304" pitchFamily="18" charset="0"/>
+              <a:cs typeface="Times New Roman" panose="02020603050405020304" pitchFamily="18" charset="0"/>
+            </a:endParaRPr>
+          </a:p>
+          <a:p>
+            <a:pPr algn="just"/>
+            <a:r>
+              <a:rPr lang="en-US" dirty="0">
+                <a:latin typeface="Times New Roman" panose="02020603050405020304" pitchFamily="18" charset="0"/>
+                <a:cs typeface="Times New Roman" panose="02020603050405020304" pitchFamily="18" charset="0"/>
+              </a:rPr>
+              <a:t>Therefore, there is a need to study how to train ML models on encrypted data efficiently, while maintaining model accuracy and privacy.</a:t>
+            </a:r>
+          </a:p>
+          <a:p>
+            <a:pPr marL="0" indent="0" algn="just">
+              <a:buNone/>
+            </a:pPr>
+            <a:endParaRPr lang="en-US" dirty="0">
+              <a:latin typeface="Times New Roman" panose="02020603050405020304" pitchFamily="18" charset="0"/>
+              <a:cs typeface="Times New Roman" panose="02020603050405020304" pitchFamily="18" charset="0"/>
+            </a:endParaRPr>
+          </a:p>
+          <a:p>
+            <a:pPr algn="just"/>
+            <a:r>
+              <a:rPr lang="en-US" dirty="0">
+                <a:latin typeface="Times New Roman" panose="02020603050405020304" pitchFamily="18" charset="0"/>
+                <a:cs typeface="Times New Roman" panose="02020603050405020304" pitchFamily="18" charset="0"/>
+              </a:rPr>
+              <a:t>From the above studies we can see the approaches despite being advanced are approximate (not exact), error accumulates as heavier computation is involved. The schemes are slow and heavy</a:t>
+            </a:r>
+          </a:p>
+          <a:p>
+            <a:pPr marL="0" indent="0" algn="just">
+              <a:buNone/>
+            </a:pPr>
+            <a:endParaRPr lang="en-IN" dirty="0">
+              <a:latin typeface="Times New Roman" panose="02020603050405020304" pitchFamily="18" charset="0"/>
+              <a:cs typeface="Times New Roman" panose="02020603050405020304" pitchFamily="18" charset="0"/>
+            </a:endParaRPr>
+          </a:p>
+        </p:txBody>
+      </p:sp>
+    </p:spTree>
+    <p:extLst>
+      <p:ext uri="{BB962C8B-B14F-4D97-AF65-F5344CB8AC3E}">
+        <p14:creationId xmlns:p14="http://schemas.microsoft.com/office/powerpoint/2010/main" val="2374707807"/>
+      </p:ext>
+    </p:extLst>
+  </p:cSld>
+  <p:clrMapOvr>
+    <a:masterClrMapping/>
+  </p:clrMapOvr>
+</p:sld>
+</file>
+
+<file path=ppt/slides/slide15.xml><?xml version="1.0" encoding="utf-8"?>
+<p:sld xmlns:a="http://schemas.openxmlformats.org/drawingml/2006/main" xmlns:r="http://schemas.openxmlformats.org/officeDocument/2006/relationships" xmlns:p="http://schemas.openxmlformats.org/presentationml/2006/main">
+  <p:cSld>
+    <p:spTree>
+      <p:nvGrpSpPr>
+        <p:cNvPr id="1" name=""/>
+        <p:cNvGrpSpPr/>
+        <p:nvPr/>
+      </p:nvGrpSpPr>
+      <p:grpSpPr>
+        <a:xfrm>
+          <a:off x="0" y="0"/>
+          <a:ext cx="0" cy="0"/>
+          <a:chOff x="0" y="0"/>
+          <a:chExt cx="0" cy="0"/>
+        </a:xfrm>
+      </p:grpSpPr>
+      <p:sp>
+        <p:nvSpPr>
+          <p:cNvPr id="2" name="Title 1">
+            <a:extLst>
+              <a:ext uri="{FF2B5EF4-FFF2-40B4-BE49-F238E27FC236}">
                 <a16:creationId xmlns:a16="http://schemas.microsoft.com/office/drawing/2014/main" id="{EAC2C796-D371-7EE6-056A-4956DC25840D}"/>
               </a:ext>
             </a:extLst>
@@ -4087,7 +5995,452 @@
 </p:sld>
 </file>
 
-<file path=ppt/slides/slide12.xml><?xml version="1.0" encoding="utf-8"?>
+<file path=ppt/slides/slide16.xml><?xml version="1.0" encoding="utf-8"?>
+<p:sld xmlns:a="http://schemas.openxmlformats.org/drawingml/2006/main" xmlns:r="http://schemas.openxmlformats.org/officeDocument/2006/relationships" xmlns:p="http://schemas.openxmlformats.org/presentationml/2006/main">
+  <p:cSld>
+    <p:spTree>
+      <p:nvGrpSpPr>
+        <p:cNvPr id="1" name=""/>
+        <p:cNvGrpSpPr/>
+        <p:nvPr/>
+      </p:nvGrpSpPr>
+      <p:grpSpPr>
+        <a:xfrm>
+          <a:off x="0" y="0"/>
+          <a:ext cx="0" cy="0"/>
+          <a:chOff x="0" y="0"/>
+          <a:chExt cx="0" cy="0"/>
+        </a:xfrm>
+      </p:grpSpPr>
+      <p:sp>
+        <p:nvSpPr>
+          <p:cNvPr id="2" name="Title 1">
+            <a:extLst>
+              <a:ext uri="{FF2B5EF4-FFF2-40B4-BE49-F238E27FC236}">
+                <a16:creationId xmlns:a16="http://schemas.microsoft.com/office/drawing/2014/main" id="{B2341E20-7E18-41BB-7009-B057C755FC17}"/>
+              </a:ext>
+            </a:extLst>
+          </p:cNvPr>
+          <p:cNvSpPr>
+            <a:spLocks noGrp="1"/>
+          </p:cNvSpPr>
+          <p:nvPr>
+            <p:ph type="title"/>
+          </p:nvPr>
+        </p:nvSpPr>
+        <p:spPr>
+          <a:xfrm>
+            <a:off x="110066" y="94193"/>
+            <a:ext cx="3149600" cy="718608"/>
+          </a:xfrm>
+        </p:spPr>
+        <p:txBody>
+          <a:bodyPr>
+            <a:normAutofit fontScale="90000"/>
+          </a:bodyPr>
+          <a:lstStyle/>
+          <a:p>
+            <a:r>
+              <a:rPr lang="en-US" dirty="0">
+                <a:latin typeface="Times New Roman" panose="02020603050405020304" pitchFamily="18" charset="0"/>
+                <a:cs typeface="Times New Roman" panose="02020603050405020304" pitchFamily="18" charset="0"/>
+              </a:rPr>
+              <a:t>Methodology</a:t>
+            </a:r>
+            <a:endParaRPr lang="en-IN" dirty="0">
+              <a:latin typeface="Times New Roman" panose="02020603050405020304" pitchFamily="18" charset="0"/>
+              <a:cs typeface="Times New Roman" panose="02020603050405020304" pitchFamily="18" charset="0"/>
+            </a:endParaRPr>
+          </a:p>
+        </p:txBody>
+      </p:sp>
+      <p:sp>
+        <p:nvSpPr>
+          <p:cNvPr id="3" name="Content Placeholder 2">
+            <a:extLst>
+              <a:ext uri="{FF2B5EF4-FFF2-40B4-BE49-F238E27FC236}">
+                <a16:creationId xmlns:a16="http://schemas.microsoft.com/office/drawing/2014/main" id="{16E753AC-A66C-EF9D-8721-C8A10DABCCB8}"/>
+              </a:ext>
+            </a:extLst>
+          </p:cNvPr>
+          <p:cNvSpPr>
+            <a:spLocks noGrp="1"/>
+          </p:cNvSpPr>
+          <p:nvPr>
+            <p:ph idx="1"/>
+          </p:nvPr>
+        </p:nvSpPr>
+        <p:spPr>
+          <a:xfrm>
+            <a:off x="169333" y="719667"/>
+            <a:ext cx="11709400" cy="5943600"/>
+          </a:xfrm>
+        </p:spPr>
+        <p:txBody>
+          <a:bodyPr>
+            <a:normAutofit/>
+          </a:bodyPr>
+          <a:lstStyle/>
+          <a:p>
+            <a:pPr algn="just"/>
+            <a:r>
+              <a:rPr lang="en-US" b="1" dirty="0">
+                <a:latin typeface="Times New Roman" panose="02020603050405020304" pitchFamily="18" charset="0"/>
+                <a:cs typeface="Times New Roman" panose="02020603050405020304" pitchFamily="18" charset="0"/>
+              </a:rPr>
+              <a:t>Data Source Selection</a:t>
+            </a:r>
+          </a:p>
+          <a:p>
+            <a:pPr algn="just"/>
+            <a:r>
+              <a:rPr lang="en-US" sz="2400" dirty="0">
+                <a:latin typeface="Times New Roman" panose="02020603050405020304" pitchFamily="18" charset="0"/>
+                <a:cs typeface="Times New Roman" panose="02020603050405020304" pitchFamily="18" charset="0"/>
+              </a:rPr>
+              <a:t>The dataset will be obtained from Kaggle, a public repository of structured and labeled datasets used in machine learning research. Following are the reasons:-</a:t>
+            </a:r>
+          </a:p>
+          <a:p>
+            <a:pPr algn="just"/>
+            <a:r>
+              <a:rPr lang="en-US" sz="2400" dirty="0">
+                <a:latin typeface="Times New Roman" panose="02020603050405020304" pitchFamily="18" charset="0"/>
+                <a:cs typeface="Times New Roman" panose="02020603050405020304" pitchFamily="18" charset="0"/>
+              </a:rPr>
+              <a:t>Publicly accessible </a:t>
+            </a:r>
+          </a:p>
+          <a:p>
+            <a:pPr algn="just"/>
+            <a:r>
+              <a:rPr lang="en-US" sz="2400" dirty="0">
+                <a:latin typeface="Times New Roman" panose="02020603050405020304" pitchFamily="18" charset="0"/>
+                <a:cs typeface="Times New Roman" panose="02020603050405020304" pitchFamily="18" charset="0"/>
+              </a:rPr>
+              <a:t>Clean documentation and metadata</a:t>
+            </a:r>
+          </a:p>
+          <a:p>
+            <a:pPr algn="just"/>
+            <a:r>
+              <a:rPr lang="en-US" sz="2400" dirty="0">
+                <a:latin typeface="Times New Roman" panose="02020603050405020304" pitchFamily="18" charset="0"/>
+                <a:cs typeface="Times New Roman" panose="02020603050405020304" pitchFamily="18" charset="0"/>
+              </a:rPr>
+              <a:t>Standardized formats (CSV, tabular numeric data)</a:t>
+            </a:r>
+          </a:p>
+          <a:p>
+            <a:pPr algn="just"/>
+            <a:r>
+              <a:rPr lang="en-US" sz="2400" dirty="0">
+                <a:latin typeface="Times New Roman" panose="02020603050405020304" pitchFamily="18" charset="0"/>
+                <a:cs typeface="Times New Roman" panose="02020603050405020304" pitchFamily="18" charset="0"/>
+              </a:rPr>
+              <a:t>Commonly used in academic ML experiments</a:t>
+            </a:r>
+          </a:p>
+          <a:p>
+            <a:pPr algn="just"/>
+            <a:r>
+              <a:rPr lang="en-US" sz="2400" dirty="0">
+                <a:latin typeface="Times New Roman" panose="02020603050405020304" pitchFamily="18" charset="0"/>
+                <a:cs typeface="Times New Roman" panose="02020603050405020304" pitchFamily="18" charset="0"/>
+              </a:rPr>
+              <a:t>Contains datasets of manageable size suitable for homomorphic encryption experiments</a:t>
+            </a:r>
+          </a:p>
+          <a:p>
+            <a:pPr algn="just"/>
+            <a:r>
+              <a:rPr lang="en-US" sz="2400" dirty="0">
+                <a:latin typeface="Times New Roman" panose="02020603050405020304" pitchFamily="18" charset="0"/>
+                <a:cs typeface="Times New Roman" panose="02020603050405020304" pitchFamily="18" charset="0"/>
+              </a:rPr>
+              <a:t>Homomorphic encryption is computationally expensive, so using extremely large datasets is impractical for experimental evaluation. Therefore, a moderate-size dataset will be selected.</a:t>
+            </a:r>
+          </a:p>
+          <a:p>
+            <a:endParaRPr lang="en-IN" dirty="0"/>
+          </a:p>
+        </p:txBody>
+      </p:sp>
+    </p:spTree>
+    <p:extLst>
+      <p:ext uri="{BB962C8B-B14F-4D97-AF65-F5344CB8AC3E}">
+        <p14:creationId xmlns:p14="http://schemas.microsoft.com/office/powerpoint/2010/main" val="3706902551"/>
+      </p:ext>
+    </p:extLst>
+  </p:cSld>
+  <p:clrMapOvr>
+    <a:masterClrMapping/>
+  </p:clrMapOvr>
+</p:sld>
+</file>
+
+<file path=ppt/slides/slide17.xml><?xml version="1.0" encoding="utf-8"?>
+<p:sld xmlns:a="http://schemas.openxmlformats.org/drawingml/2006/main" xmlns:r="http://schemas.openxmlformats.org/officeDocument/2006/relationships" xmlns:p="http://schemas.openxmlformats.org/presentationml/2006/main">
+  <p:cSld>
+    <p:spTree>
+      <p:nvGrpSpPr>
+        <p:cNvPr id="1" name=""/>
+        <p:cNvGrpSpPr/>
+        <p:nvPr/>
+      </p:nvGrpSpPr>
+      <p:grpSpPr>
+        <a:xfrm>
+          <a:off x="0" y="0"/>
+          <a:ext cx="0" cy="0"/>
+          <a:chOff x="0" y="0"/>
+          <a:chExt cx="0" cy="0"/>
+        </a:xfrm>
+      </p:grpSpPr>
+      <p:sp>
+        <p:nvSpPr>
+          <p:cNvPr id="2" name="Title 1">
+            <a:extLst>
+              <a:ext uri="{FF2B5EF4-FFF2-40B4-BE49-F238E27FC236}">
+                <a16:creationId xmlns:a16="http://schemas.microsoft.com/office/drawing/2014/main" id="{FC1EF37A-D4A7-0BD7-57CF-8164831B248D}"/>
+              </a:ext>
+            </a:extLst>
+          </p:cNvPr>
+          <p:cNvSpPr>
+            <a:spLocks noGrp="1"/>
+          </p:cNvSpPr>
+          <p:nvPr>
+            <p:ph type="title"/>
+          </p:nvPr>
+        </p:nvSpPr>
+        <p:spPr>
+          <a:xfrm>
+            <a:off x="118533" y="174095"/>
+            <a:ext cx="3412067" cy="506942"/>
+          </a:xfrm>
+        </p:spPr>
+        <p:txBody>
+          <a:bodyPr>
+            <a:normAutofit fontScale="90000"/>
+          </a:bodyPr>
+          <a:lstStyle/>
+          <a:p>
+            <a:r>
+              <a:rPr lang="en-US" dirty="0">
+                <a:latin typeface="Times New Roman" panose="02020603050405020304" pitchFamily="18" charset="0"/>
+                <a:cs typeface="Times New Roman" panose="02020603050405020304" pitchFamily="18" charset="0"/>
+              </a:rPr>
+              <a:t>Methodology</a:t>
+            </a:r>
+            <a:endParaRPr lang="en-IN" dirty="0">
+              <a:latin typeface="Times New Roman" panose="02020603050405020304" pitchFamily="18" charset="0"/>
+              <a:cs typeface="Times New Roman" panose="02020603050405020304" pitchFamily="18" charset="0"/>
+            </a:endParaRPr>
+          </a:p>
+        </p:txBody>
+      </p:sp>
+      <p:sp>
+        <p:nvSpPr>
+          <p:cNvPr id="3" name="Content Placeholder 2">
+            <a:extLst>
+              <a:ext uri="{FF2B5EF4-FFF2-40B4-BE49-F238E27FC236}">
+                <a16:creationId xmlns:a16="http://schemas.microsoft.com/office/drawing/2014/main" id="{278C2A95-39C7-DD4E-87E4-1F999A9F7784}"/>
+              </a:ext>
+            </a:extLst>
+          </p:cNvPr>
+          <p:cNvSpPr>
+            <a:spLocks noGrp="1"/>
+          </p:cNvSpPr>
+          <p:nvPr>
+            <p:ph idx="1"/>
+          </p:nvPr>
+        </p:nvSpPr>
+        <p:spPr>
+          <a:xfrm>
+            <a:off x="228600" y="762000"/>
+            <a:ext cx="11785600" cy="5921905"/>
+          </a:xfrm>
+        </p:spPr>
+        <p:txBody>
+          <a:bodyPr>
+            <a:normAutofit/>
+          </a:bodyPr>
+          <a:lstStyle/>
+          <a:p>
+            <a:r>
+              <a:rPr lang="en-US" sz="2400" b="1" dirty="0">
+                <a:latin typeface="Times New Roman" panose="02020603050405020304" pitchFamily="18" charset="0"/>
+                <a:cs typeface="Times New Roman" panose="02020603050405020304" pitchFamily="18" charset="0"/>
+              </a:rPr>
+              <a:t>Type of Data To Be Used :-</a:t>
+            </a:r>
+          </a:p>
+          <a:p>
+            <a:r>
+              <a:rPr lang="en-US" sz="2400" dirty="0">
+                <a:latin typeface="Times New Roman" panose="02020603050405020304" pitchFamily="18" charset="0"/>
+                <a:cs typeface="Times New Roman" panose="02020603050405020304" pitchFamily="18" charset="0"/>
+              </a:rPr>
+              <a:t>The project will use numeric tabular data.</a:t>
+            </a:r>
+          </a:p>
+          <a:p>
+            <a:r>
+              <a:rPr lang="en-US" sz="2400" b="1" dirty="0">
+                <a:latin typeface="Times New Roman" panose="02020603050405020304" pitchFamily="18" charset="0"/>
+                <a:cs typeface="Times New Roman" panose="02020603050405020304" pitchFamily="18" charset="0"/>
+              </a:rPr>
+              <a:t>Dataset Size and Structure:-</a:t>
+            </a:r>
+          </a:p>
+          <a:p>
+            <a:pPr marL="0" indent="0">
+              <a:buNone/>
+            </a:pPr>
+            <a:r>
+              <a:rPr lang="en-US" sz="2400" b="1" dirty="0">
+                <a:latin typeface="Times New Roman" panose="02020603050405020304" pitchFamily="18" charset="0"/>
+                <a:cs typeface="Times New Roman" panose="02020603050405020304" pitchFamily="18" charset="0"/>
+              </a:rPr>
+              <a:t>Sample size</a:t>
+            </a:r>
+            <a:r>
+              <a:rPr lang="en-US" sz="2400" dirty="0">
+                <a:latin typeface="Times New Roman" panose="02020603050405020304" pitchFamily="18" charset="0"/>
+                <a:cs typeface="Times New Roman" panose="02020603050405020304" pitchFamily="18" charset="0"/>
+              </a:rPr>
+              <a:t> &lt;10,000 records</a:t>
+            </a:r>
+          </a:p>
+          <a:p>
+            <a:r>
+              <a:rPr lang="en-US" sz="2400" b="1" dirty="0">
+                <a:latin typeface="Times New Roman" panose="02020603050405020304" pitchFamily="18" charset="0"/>
+                <a:cs typeface="Times New Roman" panose="02020603050405020304" pitchFamily="18" charset="0"/>
+              </a:rPr>
+              <a:t>Data Preprocessing:-</a:t>
+            </a:r>
+          </a:p>
+          <a:p>
+            <a:pPr marL="0" indent="0">
+              <a:buNone/>
+            </a:pPr>
+            <a:r>
+              <a:rPr lang="en-US" sz="2400" dirty="0">
+                <a:latin typeface="Times New Roman" panose="02020603050405020304" pitchFamily="18" charset="0"/>
+                <a:cs typeface="Times New Roman" panose="02020603050405020304" pitchFamily="18" charset="0"/>
+              </a:rPr>
+              <a:t>Before training or encryption, the dataset will be preprocessed to ensure compatibility with both machine learning and homomorphic encryption.</a:t>
+            </a:r>
+          </a:p>
+          <a:p>
+            <a:pPr marL="0" indent="0">
+              <a:buNone/>
+            </a:pPr>
+            <a:r>
+              <a:rPr lang="en-US" sz="2400" b="1" dirty="0">
+                <a:latin typeface="Times New Roman" panose="02020603050405020304" pitchFamily="18" charset="0"/>
+                <a:cs typeface="Times New Roman" panose="02020603050405020304" pitchFamily="18" charset="0"/>
+              </a:rPr>
+              <a:t>Libraries required for data pre processing and encryption:-</a:t>
+            </a:r>
+          </a:p>
+          <a:p>
+            <a:r>
+              <a:rPr lang="en-US" sz="2400" dirty="0">
+                <a:latin typeface="Times New Roman" panose="02020603050405020304" pitchFamily="18" charset="0"/>
+                <a:cs typeface="Times New Roman" panose="02020603050405020304" pitchFamily="18" charset="0"/>
+              </a:rPr>
+              <a:t>NumPy (python) (for mathematical operations) , pandas (to load data sets, handle missing values), Scikit learn( for splitting data sets, normalization, also has built in data sets. </a:t>
+            </a:r>
+            <a:r>
+              <a:rPr lang="en-US" sz="2400" dirty="0" err="1">
+                <a:latin typeface="Times New Roman" panose="02020603050405020304" pitchFamily="18" charset="0"/>
+                <a:cs typeface="Times New Roman" panose="02020603050405020304" pitchFamily="18" charset="0"/>
+              </a:rPr>
+              <a:t>Pyfhel</a:t>
+            </a:r>
+            <a:r>
+              <a:rPr lang="en-US" sz="2400" dirty="0">
+                <a:latin typeface="Times New Roman" panose="02020603050405020304" pitchFamily="18" charset="0"/>
+                <a:cs typeface="Times New Roman" panose="02020603050405020304" pitchFamily="18" charset="0"/>
+              </a:rPr>
+              <a:t> or </a:t>
+            </a:r>
+            <a:r>
+              <a:rPr lang="en-US" sz="2400" dirty="0" err="1">
+                <a:latin typeface="Times New Roman" panose="02020603050405020304" pitchFamily="18" charset="0"/>
+                <a:cs typeface="Times New Roman" panose="02020603050405020304" pitchFamily="18" charset="0"/>
+              </a:rPr>
+              <a:t>tenSeal</a:t>
+            </a:r>
+            <a:r>
+              <a:rPr lang="en-US" sz="2400" dirty="0">
+                <a:latin typeface="Times New Roman" panose="02020603050405020304" pitchFamily="18" charset="0"/>
+                <a:cs typeface="Times New Roman" panose="02020603050405020304" pitchFamily="18" charset="0"/>
+              </a:rPr>
+              <a:t> for HE.</a:t>
+            </a:r>
+            <a:br>
+              <a:rPr lang="en-US" sz="2400" dirty="0">
+                <a:latin typeface="Times New Roman" panose="02020603050405020304" pitchFamily="18" charset="0"/>
+                <a:cs typeface="Times New Roman" panose="02020603050405020304" pitchFamily="18" charset="0"/>
+              </a:rPr>
+            </a:br>
+            <a:endParaRPr lang="en-US" sz="2400" dirty="0">
+              <a:latin typeface="Times New Roman" panose="02020603050405020304" pitchFamily="18" charset="0"/>
+              <a:cs typeface="Times New Roman" panose="02020603050405020304" pitchFamily="18" charset="0"/>
+            </a:endParaRPr>
+          </a:p>
+          <a:p>
+            <a:r>
+              <a:rPr lang="en-US" sz="2400" b="1" dirty="0">
+                <a:latin typeface="Times New Roman" panose="02020603050405020304" pitchFamily="18" charset="0"/>
+                <a:cs typeface="Times New Roman" panose="02020603050405020304" pitchFamily="18" charset="0"/>
+              </a:rPr>
+              <a:t>(after pre processing data the aim is to train ML models, HE set up, Encrypted inference </a:t>
+            </a:r>
+            <a:r>
+              <a:rPr lang="en-US" sz="2400" b="1" dirty="0" err="1">
+                <a:latin typeface="Times New Roman" panose="02020603050405020304" pitchFamily="18" charset="0"/>
+                <a:cs typeface="Times New Roman" panose="02020603050405020304" pitchFamily="18" charset="0"/>
+              </a:rPr>
+              <a:t>i.e</a:t>
+            </a:r>
+            <a:r>
+              <a:rPr lang="en-US" sz="2400" b="1" dirty="0">
+                <a:latin typeface="Times New Roman" panose="02020603050405020304" pitchFamily="18" charset="0"/>
+                <a:cs typeface="Times New Roman" panose="02020603050405020304" pitchFamily="18" charset="0"/>
+              </a:rPr>
+              <a:t> testing data </a:t>
+            </a:r>
+            <a:r>
+              <a:rPr lang="en-US" sz="2400" dirty="0">
+                <a:latin typeface="Times New Roman" panose="02020603050405020304" pitchFamily="18" charset="0"/>
+                <a:cs typeface="Times New Roman" panose="02020603050405020304" pitchFamily="18" charset="0"/>
+              </a:rPr>
+              <a:t>)</a:t>
+            </a:r>
+            <a:endParaRPr lang="en-IN" sz="2400" dirty="0">
+              <a:latin typeface="Times New Roman" panose="02020603050405020304" pitchFamily="18" charset="0"/>
+              <a:cs typeface="Times New Roman" panose="02020603050405020304" pitchFamily="18" charset="0"/>
+            </a:endParaRPr>
+          </a:p>
+        </p:txBody>
+      </p:sp>
+    </p:spTree>
+    <p:extLst>
+      <p:ext uri="{BB962C8B-B14F-4D97-AF65-F5344CB8AC3E}">
+        <p14:creationId xmlns:p14="http://schemas.microsoft.com/office/powerpoint/2010/main" val="2211016304"/>
+      </p:ext>
+    </p:extLst>
+  </p:cSld>
+  <p:clrMapOvr>
+    <a:masterClrMapping/>
+  </p:clrMapOvr>
+</p:sld>
+</file>
+
+<file path=ppt/slides/slide18.xml><?xml version="1.0" encoding="utf-8"?>
 <p:sld xmlns:a="http://schemas.openxmlformats.org/drawingml/2006/main" xmlns:r="http://schemas.openxmlformats.org/officeDocument/2006/relationships" xmlns:p="http://schemas.openxmlformats.org/presentationml/2006/main">
   <p:cSld>
     <p:spTree>
@@ -4500,7 +6853,7 @@
 </p:sld>
 </file>
 
-<file path=ppt/slides/slide13.xml><?xml version="1.0" encoding="utf-8"?>
+<file path=ppt/slides/slide19.xml><?xml version="1.0" encoding="utf-8"?>
 <p:sld xmlns:a="http://schemas.openxmlformats.org/drawingml/2006/main" xmlns:r="http://schemas.openxmlformats.org/officeDocument/2006/relationships" xmlns:p="http://schemas.openxmlformats.org/presentationml/2006/main">
   <p:cSld>
     <p:spTree>
@@ -4656,72 +7009,6 @@
     <p:extLst>
       <p:ext uri="{BB962C8B-B14F-4D97-AF65-F5344CB8AC3E}">
         <p14:creationId xmlns:p14="http://schemas.microsoft.com/office/powerpoint/2010/main" val="2724917500"/>
-      </p:ext>
-    </p:extLst>
-  </p:cSld>
-  <p:clrMapOvr>
-    <a:masterClrMapping/>
-  </p:clrMapOvr>
-</p:sld>
-</file>
-
-<file path=ppt/slides/slide14.xml><?xml version="1.0" encoding="utf-8"?>
-<p:sld xmlns:a="http://schemas.openxmlformats.org/drawingml/2006/main" xmlns:r="http://schemas.openxmlformats.org/officeDocument/2006/relationships" xmlns:p="http://schemas.openxmlformats.org/presentationml/2006/main">
-  <p:cSld>
-    <p:spTree>
-      <p:nvGrpSpPr>
-        <p:cNvPr id="1" name=""/>
-        <p:cNvGrpSpPr/>
-        <p:nvPr/>
-      </p:nvGrpSpPr>
-      <p:grpSpPr>
-        <a:xfrm>
-          <a:off x="0" y="0"/>
-          <a:ext cx="0" cy="0"/>
-          <a:chOff x="0" y="0"/>
-          <a:chExt cx="0" cy="0"/>
-        </a:xfrm>
-      </p:grpSpPr>
-      <p:sp>
-        <p:nvSpPr>
-          <p:cNvPr id="4" name="Title 3">
-            <a:extLst>
-              <a:ext uri="{FF2B5EF4-FFF2-40B4-BE49-F238E27FC236}">
-                <a16:creationId xmlns:a16="http://schemas.microsoft.com/office/drawing/2014/main" id="{C7208BD6-2A31-5677-2B53-FD39A887D102}"/>
-              </a:ext>
-            </a:extLst>
-          </p:cNvPr>
-          <p:cNvSpPr>
-            <a:spLocks noGrp="1"/>
-          </p:cNvSpPr>
-          <p:nvPr>
-            <p:ph type="title"/>
-          </p:nvPr>
-        </p:nvSpPr>
-        <p:spPr>
-          <a:xfrm>
-            <a:off x="838199" y="2618467"/>
-            <a:ext cx="7431157" cy="2510124"/>
-          </a:xfrm>
-        </p:spPr>
-        <p:txBody>
-          <a:bodyPr/>
-          <a:lstStyle/>
-          <a:p>
-            <a:r>
-              <a:rPr lang="en-IN" dirty="0">
-                <a:latin typeface="Times New Roman" panose="02020603050405020304" pitchFamily="18" charset="0"/>
-                <a:cs typeface="Times New Roman" panose="02020603050405020304" pitchFamily="18" charset="0"/>
-              </a:rPr>
-              <a:t>Thank You</a:t>
-            </a:r>
-          </a:p>
-        </p:txBody>
-      </p:sp>
-    </p:spTree>
-    <p:extLst>
-      <p:ext uri="{BB962C8B-B14F-4D97-AF65-F5344CB8AC3E}">
-        <p14:creationId xmlns:p14="http://schemas.microsoft.com/office/powerpoint/2010/main" val="2374710685"/>
       </p:ext>
     </p:extLst>
   </p:cSld>
@@ -4877,6 +7164,72 @@
     <p:extLst>
       <p:ext uri="{BB962C8B-B14F-4D97-AF65-F5344CB8AC3E}">
         <p14:creationId xmlns:p14="http://schemas.microsoft.com/office/powerpoint/2010/main" val="4047219808"/>
+      </p:ext>
+    </p:extLst>
+  </p:cSld>
+  <p:clrMapOvr>
+    <a:masterClrMapping/>
+  </p:clrMapOvr>
+</p:sld>
+</file>
+
+<file path=ppt/slides/slide20.xml><?xml version="1.0" encoding="utf-8"?>
+<p:sld xmlns:a="http://schemas.openxmlformats.org/drawingml/2006/main" xmlns:r="http://schemas.openxmlformats.org/officeDocument/2006/relationships" xmlns:p="http://schemas.openxmlformats.org/presentationml/2006/main">
+  <p:cSld>
+    <p:spTree>
+      <p:nvGrpSpPr>
+        <p:cNvPr id="1" name=""/>
+        <p:cNvGrpSpPr/>
+        <p:nvPr/>
+      </p:nvGrpSpPr>
+      <p:grpSpPr>
+        <a:xfrm>
+          <a:off x="0" y="0"/>
+          <a:ext cx="0" cy="0"/>
+          <a:chOff x="0" y="0"/>
+          <a:chExt cx="0" cy="0"/>
+        </a:xfrm>
+      </p:grpSpPr>
+      <p:sp>
+        <p:nvSpPr>
+          <p:cNvPr id="4" name="Title 3">
+            <a:extLst>
+              <a:ext uri="{FF2B5EF4-FFF2-40B4-BE49-F238E27FC236}">
+                <a16:creationId xmlns:a16="http://schemas.microsoft.com/office/drawing/2014/main" id="{C7208BD6-2A31-5677-2B53-FD39A887D102}"/>
+              </a:ext>
+            </a:extLst>
+          </p:cNvPr>
+          <p:cNvSpPr>
+            <a:spLocks noGrp="1"/>
+          </p:cNvSpPr>
+          <p:nvPr>
+            <p:ph type="title"/>
+          </p:nvPr>
+        </p:nvSpPr>
+        <p:spPr>
+          <a:xfrm>
+            <a:off x="838199" y="2618467"/>
+            <a:ext cx="7431157" cy="2510124"/>
+          </a:xfrm>
+        </p:spPr>
+        <p:txBody>
+          <a:bodyPr/>
+          <a:lstStyle/>
+          <a:p>
+            <a:r>
+              <a:rPr lang="en-IN" dirty="0">
+                <a:latin typeface="Times New Roman" panose="02020603050405020304" pitchFamily="18" charset="0"/>
+                <a:cs typeface="Times New Roman" panose="02020603050405020304" pitchFamily="18" charset="0"/>
+              </a:rPr>
+              <a:t>Thank You</a:t>
+            </a:r>
+          </a:p>
+        </p:txBody>
+      </p:sp>
+    </p:spTree>
+    <p:extLst>
+      <p:ext uri="{BB962C8B-B14F-4D97-AF65-F5344CB8AC3E}">
+        <p14:creationId xmlns:p14="http://schemas.microsoft.com/office/powerpoint/2010/main" val="2374710685"/>
       </p:ext>
     </p:extLst>
   </p:cSld>
@@ -6529,4 +8882,319 @@
     </a:ext>
   </a:extLst>
 </a:theme>
+</file>
+
+<file path=ppt/theme/theme2.xml><?xml version="1.0" encoding="utf-8"?>
+<a:theme xmlns:a="http://schemas.openxmlformats.org/drawingml/2006/main" name="Office Theme">
+  <a:themeElements>
+    <a:clrScheme name="Office">
+      <a:dk1>
+        <a:sysClr val="windowText" lastClr="000000"/>
+      </a:dk1>
+      <a:lt1>
+        <a:sysClr val="window" lastClr="FFFFFF"/>
+      </a:lt1>
+      <a:dk2>
+        <a:srgbClr val="0E2841"/>
+      </a:dk2>
+      <a:lt2>
+        <a:srgbClr val="E8E8E8"/>
+      </a:lt2>
+      <a:accent1>
+        <a:srgbClr val="156082"/>
+      </a:accent1>
+      <a:accent2>
+        <a:srgbClr val="E97132"/>
+      </a:accent2>
+      <a:accent3>
+        <a:srgbClr val="196B24"/>
+      </a:accent3>
+      <a:accent4>
+        <a:srgbClr val="0F9ED5"/>
+      </a:accent4>
+      <a:accent5>
+        <a:srgbClr val="A02B93"/>
+      </a:accent5>
+      <a:accent6>
+        <a:srgbClr val="4EA72E"/>
+      </a:accent6>
+      <a:hlink>
+        <a:srgbClr val="467886"/>
+      </a:hlink>
+      <a:folHlink>
+        <a:srgbClr val="96607D"/>
+      </a:folHlink>
+    </a:clrScheme>
+    <a:fontScheme name="Office">
+      <a:majorFont>
+        <a:latin typeface="Aptos Display" panose="02110004020202020204"/>
+        <a:ea typeface=""/>
+        <a:cs typeface=""/>
+        <a:font script="Jpan" typeface="游ゴシック Light"/>
+        <a:font script="Hang" typeface="맑은 고딕"/>
+        <a:font script="Hans" typeface="等线 Light"/>
+        <a:font script="Hant" typeface="新細明體"/>
+        <a:font script="Arab" typeface="Times New Roman"/>
+        <a:font script="Hebr" typeface="Times New Roman"/>
+        <a:font script="Thai" typeface="Angsana New"/>
+        <a:font script="Ethi" typeface="Nyala"/>
+        <a:font script="Beng" typeface="Vrinda"/>
+        <a:font script="Gujr" typeface="Shruti"/>
+        <a:font script="Khmr" typeface="MoolBoran"/>
+        <a:font script="Knda" typeface="Tunga"/>
+        <a:font script="Guru" typeface="Raavi"/>
+        <a:font script="Cans" typeface="Euphemia"/>
+        <a:font script="Cher" typeface="Plantagenet Cherokee"/>
+        <a:font script="Yiii" typeface="Microsoft Yi Baiti"/>
+        <a:font script="Tibt" typeface="Microsoft Himalaya"/>
+        <a:font script="Thaa" typeface="MV Boli"/>
+        <a:font script="Deva" typeface="Mangal"/>
+        <a:font script="Telu" typeface="Gautami"/>
+        <a:font script="Taml" typeface="Latha"/>
+        <a:font script="Syrc" typeface="Estrangelo Edessa"/>
+        <a:font script="Orya" typeface="Kalinga"/>
+        <a:font script="Mlym" typeface="Kartika"/>
+        <a:font script="Laoo" typeface="DokChampa"/>
+        <a:font script="Sinh" typeface="Iskoola Pota"/>
+        <a:font script="Mong" typeface="Mongolian Baiti"/>
+        <a:font script="Viet" typeface="Times New Roman"/>
+        <a:font script="Uigh" typeface="Microsoft Uighur"/>
+        <a:font script="Geor" typeface="Sylfaen"/>
+        <a:font script="Armn" typeface="Arial"/>
+        <a:font script="Bugi" typeface="Leelawadee UI"/>
+        <a:font script="Bopo" typeface="Microsoft JhengHei"/>
+        <a:font script="Java" typeface="Javanese Text"/>
+        <a:font script="Lisu" typeface="Segoe UI"/>
+        <a:font script="Mymr" typeface="Myanmar Text"/>
+        <a:font script="Nkoo" typeface="Ebrima"/>
+        <a:font script="Olck" typeface="Nirmala UI"/>
+        <a:font script="Osma" typeface="Ebrima"/>
+        <a:font script="Phag" typeface="Phagspa"/>
+        <a:font script="Syrn" typeface="Estrangelo Edessa"/>
+        <a:font script="Syrj" typeface="Estrangelo Edessa"/>
+        <a:font script="Syre" typeface="Estrangelo Edessa"/>
+        <a:font script="Sora" typeface="Nirmala UI"/>
+        <a:font script="Tale" typeface="Microsoft Tai Le"/>
+        <a:font script="Talu" typeface="Microsoft New Tai Lue"/>
+        <a:font script="Tfng" typeface="Ebrima"/>
+      </a:majorFont>
+      <a:minorFont>
+        <a:latin typeface="Aptos" panose="02110004020202020204"/>
+        <a:ea typeface=""/>
+        <a:cs typeface=""/>
+        <a:font script="Jpan" typeface="游ゴシック"/>
+        <a:font script="Hang" typeface="맑은 고딕"/>
+        <a:font script="Hans" typeface="等线"/>
+        <a:font script="Hant" typeface="新細明體"/>
+        <a:font script="Arab" typeface="Arial"/>
+        <a:font script="Hebr" typeface="Arial"/>
+        <a:font script="Thai" typeface="Cordia New"/>
+        <a:font script="Ethi" typeface="Nyala"/>
+        <a:font script="Beng" typeface="Vrinda"/>
+        <a:font script="Gujr" typeface="Shruti"/>
+        <a:font script="Khmr" typeface="DaunPenh"/>
+        <a:font script="Knda" typeface="Tunga"/>
+        <a:font script="Guru" typeface="Raavi"/>
+        <a:font script="Cans" typeface="Euphemia"/>
+        <a:font script="Cher" typeface="Plantagenet Cherokee"/>
+        <a:font script="Yiii" typeface="Microsoft Yi Baiti"/>
+        <a:font script="Tibt" typeface="Microsoft Himalaya"/>
+        <a:font script="Thaa" typeface="MV Boli"/>
+        <a:font script="Deva" typeface="Mangal"/>
+        <a:font script="Telu" typeface="Gautami"/>
+        <a:font script="Taml" typeface="Latha"/>
+        <a:font script="Syrc" typeface="Estrangelo Edessa"/>
+        <a:font script="Orya" typeface="Kalinga"/>
+        <a:font script="Mlym" typeface="Kartika"/>
+        <a:font script="Laoo" typeface="DokChampa"/>
+        <a:font script="Sinh" typeface="Iskoola Pota"/>
+        <a:font script="Mong" typeface="Mongolian Baiti"/>
+        <a:font script="Viet" typeface="Arial"/>
+        <a:font script="Uigh" typeface="Microsoft Uighur"/>
+        <a:font script="Geor" typeface="Sylfaen"/>
+        <a:font script="Armn" typeface="Arial"/>
+        <a:font script="Bugi" typeface="Leelawadee UI"/>
+        <a:font script="Bopo" typeface="Microsoft JhengHei"/>
+        <a:font script="Java" typeface="Javanese Text"/>
+        <a:font script="Lisu" typeface="Segoe UI"/>
+        <a:font script="Mymr" typeface="Myanmar Text"/>
+        <a:font script="Nkoo" typeface="Ebrima"/>
+        <a:font script="Olck" typeface="Nirmala UI"/>
+        <a:font script="Osma" typeface="Ebrima"/>
+        <a:font script="Phag" typeface="Phagspa"/>
+        <a:font script="Syrn" typeface="Estrangelo Edessa"/>
+        <a:font script="Syrj" typeface="Estrangelo Edessa"/>
+        <a:font script="Syre" typeface="Estrangelo Edessa"/>
+        <a:font script="Sora" typeface="Nirmala UI"/>
+        <a:font script="Tale" typeface="Microsoft Tai Le"/>
+        <a:font script="Talu" typeface="Microsoft New Tai Lue"/>
+        <a:font script="Tfng" typeface="Ebrima"/>
+      </a:minorFont>
+    </a:fontScheme>
+    <a:fmtScheme name="Office">
+      <a:fillStyleLst>
+        <a:solidFill>
+          <a:schemeClr val="phClr"/>
+        </a:solidFill>
+        <a:gradFill rotWithShape="1">
+          <a:gsLst>
+            <a:gs pos="0">
+              <a:schemeClr val="phClr">
+                <a:lumMod val="110000"/>
+                <a:satMod val="105000"/>
+                <a:tint val="67000"/>
+              </a:schemeClr>
+            </a:gs>
+            <a:gs pos="50000">
+              <a:schemeClr val="phClr">
+                <a:lumMod val="105000"/>
+                <a:satMod val="103000"/>
+                <a:tint val="73000"/>
+              </a:schemeClr>
+            </a:gs>
+            <a:gs pos="100000">
+              <a:schemeClr val="phClr">
+                <a:lumMod val="105000"/>
+                <a:satMod val="109000"/>
+                <a:tint val="81000"/>
+              </a:schemeClr>
+            </a:gs>
+          </a:gsLst>
+          <a:lin ang="5400000" scaled="0"/>
+        </a:gradFill>
+        <a:gradFill rotWithShape="1">
+          <a:gsLst>
+            <a:gs pos="0">
+              <a:schemeClr val="phClr">
+                <a:satMod val="103000"/>
+                <a:lumMod val="102000"/>
+                <a:tint val="94000"/>
+              </a:schemeClr>
+            </a:gs>
+            <a:gs pos="50000">
+              <a:schemeClr val="phClr">
+                <a:satMod val="110000"/>
+                <a:lumMod val="100000"/>
+                <a:shade val="100000"/>
+              </a:schemeClr>
+            </a:gs>
+            <a:gs pos="100000">
+              <a:schemeClr val="phClr">
+                <a:lumMod val="99000"/>
+                <a:satMod val="120000"/>
+                <a:shade val="78000"/>
+              </a:schemeClr>
+            </a:gs>
+          </a:gsLst>
+          <a:lin ang="5400000" scaled="0"/>
+        </a:gradFill>
+      </a:fillStyleLst>
+      <a:lnStyleLst>
+        <a:ln w="12700" cap="flat" cmpd="sng" algn="ctr">
+          <a:solidFill>
+            <a:schemeClr val="phClr"/>
+          </a:solidFill>
+          <a:prstDash val="solid"/>
+          <a:miter lim="800000"/>
+        </a:ln>
+        <a:ln w="19050" cap="flat" cmpd="sng" algn="ctr">
+          <a:solidFill>
+            <a:schemeClr val="phClr"/>
+          </a:solidFill>
+          <a:prstDash val="solid"/>
+          <a:miter lim="800000"/>
+        </a:ln>
+        <a:ln w="25400" cap="flat" cmpd="sng" algn="ctr">
+          <a:solidFill>
+            <a:schemeClr val="phClr"/>
+          </a:solidFill>
+          <a:prstDash val="solid"/>
+          <a:miter lim="800000"/>
+        </a:ln>
+      </a:lnStyleLst>
+      <a:effectStyleLst>
+        <a:effectStyle>
+          <a:effectLst/>
+        </a:effectStyle>
+        <a:effectStyle>
+          <a:effectLst/>
+        </a:effectStyle>
+        <a:effectStyle>
+          <a:effectLst>
+            <a:outerShdw blurRad="57150" dist="19050" dir="5400000" algn="ctr" rotWithShape="0">
+              <a:srgbClr val="000000">
+                <a:alpha val="63000"/>
+              </a:srgbClr>
+            </a:outerShdw>
+          </a:effectLst>
+        </a:effectStyle>
+      </a:effectStyleLst>
+      <a:bgFillStyleLst>
+        <a:solidFill>
+          <a:schemeClr val="phClr"/>
+        </a:solidFill>
+        <a:solidFill>
+          <a:schemeClr val="phClr">
+            <a:tint val="95000"/>
+            <a:satMod val="170000"/>
+          </a:schemeClr>
+        </a:solidFill>
+        <a:gradFill rotWithShape="1">
+          <a:gsLst>
+            <a:gs pos="0">
+              <a:schemeClr val="phClr">
+                <a:tint val="93000"/>
+                <a:satMod val="150000"/>
+                <a:shade val="98000"/>
+                <a:lumMod val="102000"/>
+              </a:schemeClr>
+            </a:gs>
+            <a:gs pos="50000">
+              <a:schemeClr val="phClr">
+                <a:tint val="98000"/>
+                <a:satMod val="130000"/>
+                <a:shade val="90000"/>
+                <a:lumMod val="103000"/>
+              </a:schemeClr>
+            </a:gs>
+            <a:gs pos="100000">
+              <a:schemeClr val="phClr">
+                <a:shade val="63000"/>
+                <a:satMod val="120000"/>
+              </a:schemeClr>
+            </a:gs>
+          </a:gsLst>
+          <a:lin ang="5400000" scaled="0"/>
+        </a:gradFill>
+      </a:bgFillStyleLst>
+    </a:fmtScheme>
+  </a:themeElements>
+  <a:objectDefaults>
+    <a:lnDef>
+      <a:spPr/>
+      <a:bodyPr/>
+      <a:lstStyle/>
+      <a:style>
+        <a:lnRef idx="2">
+          <a:schemeClr val="accent1"/>
+        </a:lnRef>
+        <a:fillRef idx="0">
+          <a:schemeClr val="accent1"/>
+        </a:fillRef>
+        <a:effectRef idx="1">
+          <a:schemeClr val="accent1"/>
+        </a:effectRef>
+        <a:fontRef idx="minor">
+          <a:schemeClr val="tx1"/>
+        </a:fontRef>
+      </a:style>
+    </a:lnDef>
+  </a:objectDefaults>
+  <a:extraClrSchemeLst/>
+  <a:extLst>
+    <a:ext uri="{05A4C25C-085E-4340-85A3-A5531E510DB2}">
+      <thm15:themeFamily xmlns:thm15="http://schemas.microsoft.com/office/thememl/2012/main" name="Office Theme" id="{2E142A2C-CD16-42D6-873A-C26D2A0506FA}" vid="{1BDDFF52-6CD6-40A5-AB3C-68EB2F1E4D0A}"/>
+    </a:ext>
+  </a:extLst>
+</a:theme>
 </file>